--- a/standards/People-Directory-Visual-Guide.pptx
+++ b/standards/People-Directory-Visual-Guide.pptx
@@ -12,6 +12,7 @@
     <p:sldId id="260" r:id="rId12"/>
     <p:sldId id="261" r:id="rId13"/>
     <p:sldId id="262" r:id="rId14"/>
+    <p:sldId id="263" r:id="rId15"/>
   </p:sldIdLst>
   <p:sldSz cx="14630400" cy="8229600" type="screen4x3"/>
   <p:notesSz cx="6858000" cy="9144000"/>
@@ -589,13 +590,13 @@
           <a:lstStyle/>
           <a:p>
             <a:r>
-              <a:t>Use these thresholds for the main directory, categories, and subcategories. Up to 24: all entries on one page, no pagination. 25–40: 24 per page, native pagination below the grid. More than 40: same pagination plus scoped search and relevant filters. 40 means two pages (24 and 16); 60 means three pages (24, 24, and 12). Screenshots intentionally show top-of-page and bottom-of-list excerpts rather than shrinking a whole long page. The 24-record illustration is rendered using the native NDT4 40-profile example reduced locally to 24 records for this deck. No live page was changed.</a:t>
+              <a:t>The same People Directory structure applies to NDT4, NDT3, and Notre Dame Theme 2.4. Keep each theme’s native visual styling; the standard defines navigation, page titles, sidebar groups, profile ordering, four desktop columns, profile destinations, and directory-size thresholds. Theme styles do not need to look identical. These screenshots are the current published theme examples. NDT3: https://prugamba-nd.github.io/people-hub-mockup/ndt3/ ; Theme 2.4: https://prugamba-nd.github.io/people-hub-mockup/ndt24/</a:t>
             </a:r>
           </a:p>
           <a:p/>
           <a:p>
             <a:r>
-              <a:t>Source / example: https://prugamba-nd.github.io/people-hub-mockup/screens/</a:t>
+              <a:t>Source / example: https://prugamba-nd.github.io/people-hub-mockup/</a:t>
             </a:r>
           </a:p>
           <a:p>
@@ -670,13 +671,13 @@
           <a:lstStyle/>
           <a:p>
             <a:r>
-              <a:t>Each category opens a dedicated page, with one title and no lede or additional section headings. The default group is implicit: Faculty displays core affiliated faculty. Additional groups appear only beneath the selected parent. This capture removes the old extra Core Affiliated Faculty heading and sorts profiles by surname locally to illustrate the proposed standard; the live category example may still contain it. Parent defaults: Leadership=institute leadership; Faculty=core affiliated faculty; Staff=institute staff; Scholars &amp; Fellows=visiting scholars and fellows; Students=undergraduate and graduate, excluding PhD. The reviewed draft also lists PhDs on the market under Scholars &amp; Fellows; retain for institute feedback.</a:t>
+              <a:t>Use these thresholds for the main directory, categories, and subcategories. Up to 24: all entries on one page, no pagination. 25–40: 24 per page, native pagination below the grid. More than 40: same pagination plus scoped search and relevant filters. 40 means two pages (24 and 16); 60 means three pages (24, 24, and 12). Screenshots intentionally show top-of-page and bottom-of-list excerpts rather than shrinking a whole long page. The 24-record illustration is rendered using the native NDT4 40-profile example reduced locally to 24 records for this deck. No live page was changed.</a:t>
             </a:r>
           </a:p>
           <a:p/>
           <a:p>
             <a:r>
-              <a:t>Source / example: https://prugamba-nd.github.io/people-hub-mockup/faculty/</a:t>
+              <a:t>Source / example: https://prugamba-nd.github.io/people-hub-mockup/screens/</a:t>
             </a:r>
           </a:p>
           <a:p>
@@ -751,13 +752,13 @@
           <a:lstStyle/>
           <a:p>
             <a:r>
-              <a:t>When the full biography is maintained on the Keough School website, the directory card links directly to that profile. Do not create an intermediate institute biography page. NDT4 supplies the external-link arrow automatically for external card URLs. The public school example is Scott Appleby; the card’s link and photo source are recorded in the prototype.</a:t>
+              <a:t>Each category opens a dedicated page, with one title and no lede or additional section headings. The default group is implicit: Faculty displays core affiliated faculty. Additional groups appear only beneath the selected parent. This capture removes the old extra Core Affiliated Faculty heading and sorts profiles by surname locally to illustrate the proposed standard; the live category example may still contain it. Parent defaults: Leadership=institute leadership; Faculty=core affiliated faculty; Staff=institute staff; Scholars &amp; Fellows=visiting scholars and fellows; Students=undergraduate and graduate, excluding PhD. The reviewed draft also lists PhDs on the market under Scholars &amp; Fellows; retain for institute feedback.</a:t>
             </a:r>
           </a:p>
           <a:p/>
           <a:p>
             <a:r>
-              <a:t>Source / example: https://prugamba-nd.github.io/people-hub-mockup/profile-examples/external-profile/</a:t>
+              <a:t>Source / example: https://prugamba-nd.github.io/people-hub-mockup/faculty/</a:t>
             </a:r>
           </a:p>
           <a:p>
@@ -832,13 +833,13 @@
           <a:lstStyle/>
           <a:p>
             <a:r>
-              <a:t>Use the native biography layout shown on the Ann Firth page: name and role at the top, biography at left, portrait and contact details at right. The institute maintains the full biography. This example uses fictional Maren Okafor and reserved example.org contact details. Layout reference: https://president.nd.edu/about/leadership-and-staff/ann-firth/</a:t>
+              <a:t>When the full biography is maintained on the Keough School website, the directory card links directly to that profile. Do not create an intermediate institute biography page. NDT4 supplies the external-link arrow automatically for external card URLs. The public school example is Scott Appleby; the card’s link and photo source are recorded in the prototype.</a:t>
             </a:r>
           </a:p>
           <a:p/>
           <a:p>
             <a:r>
-              <a:t>Source / example: https://prugamba-nd.github.io/people-hub-mockup/profile-examples/full-bio/</a:t>
+              <a:t>Source / example: https://prugamba-nd.github.io/people-hub-mockup/profile-examples/external-profile/</a:t>
             </a:r>
           </a:p>
           <a:p>
@@ -913,13 +914,13 @@
           <a:lstStyle/>
           <a:p>
             <a:r>
-              <a:t>Use the same native biography layout. Keep the local text short and specific to the institute relationship. Retain office and email beneath the portrait. Link the button to the full biography maintained outside the Keough School website. The example uses Daniel Philpott’s public department profile. The complete biography, publications and contact information are maintained by the department; the local text explains the institute connection.</a:t>
+              <a:t>Use the native biography layout shown on the Ann Firth page: name and role at the top, biography at left, portrait and contact details at right. The institute maintains the full biography. This example uses fictional Maren Okafor and reserved example.org contact details. Layout reference: https://president.nd.edu/about/leadership-and-staff/ann-firth/</a:t>
             </a:r>
           </a:p>
           <a:p/>
           <a:p>
             <a:r>
-              <a:t>Source / example: https://prugamba-nd.github.io/people-hub-mockup/profile-examples/abridged-bio/</a:t>
+              <a:t>Source / example: https://prugamba-nd.github.io/people-hub-mockup/profile-examples/full-bio/</a:t>
             </a:r>
           </a:p>
           <a:p>
@@ -950,6 +951,87 @@
 </file>
 
 <file path=ppt/notesSlides/notesSlide7.xml><?xml version="1.0" encoding="utf-8"?>
+<p:notes xmlns:a="http://schemas.openxmlformats.org/drawingml/2006/main" xmlns:p="http://schemas.openxmlformats.org/presentationml/2006/main" xmlns:r="http://schemas.openxmlformats.org/officeDocument/2006/relationships">
+  <p:cSld>
+    <p:spTree>
+      <p:nvGrpSpPr>
+        <p:cNvPr id="1" name=""/>
+        <p:cNvGrpSpPr/>
+        <p:nvPr/>
+      </p:nvGrpSpPr>
+      <p:grpSpPr>
+        <a:xfrm>
+          <a:off x="0" y="0"/>
+          <a:ext cx="0" cy="0"/>
+          <a:chOff x="0" y="0"/>
+          <a:chExt cx="0" cy="0"/>
+        </a:xfrm>
+      </p:grpSpPr>
+      <p:sp>
+        <p:nvSpPr>
+          <p:cNvPr id="2" name="Slide Image Placeholder 1"/>
+          <p:cNvSpPr>
+            <a:spLocks noGrp="1"/>
+          </p:cNvSpPr>
+          <p:nvPr>
+            <p:ph type="sldImg" idx="2"/>
+          </p:nvPr>
+        </p:nvSpPr>
+        <p:spPr/>
+      </p:sp>
+      <p:sp>
+        <p:nvSpPr>
+          <p:cNvPr id="3" name="Notes Placeholder 2"/>
+          <p:cNvSpPr>
+            <a:spLocks noGrp="1"/>
+          </p:cNvSpPr>
+          <p:nvPr>
+            <p:ph type="body" idx="3" sz="quarter"/>
+          </p:nvPr>
+        </p:nvSpPr>
+        <p:spPr/>
+        <p:txBody>
+          <a:bodyPr/>
+          <a:lstStyle/>
+          <a:p>
+            <a:r>
+              <a:t>Use the same native biography layout. Keep the local text short and specific to the institute relationship. Retain office and email beneath the portrait. Link the button to the full biography maintained outside the Keough School website. The example uses Daniel Philpott’s public department profile. The complete biography, publications and contact information are maintained by the department; the local text explains the institute connection.</a:t>
+            </a:r>
+          </a:p>
+          <a:p/>
+          <a:p>
+            <a:r>
+              <a:t>Source / example: https://prugamba-nd.github.io/people-hub-mockup/profile-examples/abridged-bio/</a:t>
+            </a:r>
+          </a:p>
+          <a:p>
+            <a:r>
+              <a:t>Illustrative institute mockups. The underlying website components use NDT4. Screenshots may show fictional people; public profile examples cite their sources on the linked pages.</a:t>
+            </a:r>
+          </a:p>
+        </p:txBody>
+      </p:sp>
+      <p:sp>
+        <p:nvSpPr>
+          <p:cNvPr id="4" name="Slide Number Placeholder 3"/>
+          <p:cNvSpPr>
+            <a:spLocks noGrp="1"/>
+          </p:cNvSpPr>
+          <p:nvPr>
+            <p:ph type="sldNum" idx="5" sz="quarter"/>
+          </p:nvPr>
+        </p:nvSpPr>
+        <p:spPr/>
+      </p:sp>
+    </p:spTree>
+  </p:cSld>
+  <p:clrMapOvr>
+    <a:masterClrMapping/>
+  </p:clrMapOvr>
+</p:notes>
+</file>
+
+<file path=ppt/notesSlides/notesSlide8.xml><?xml version="1.0" encoding="utf-8"?>
 <p:notes xmlns:a="http://schemas.openxmlformats.org/drawingml/2006/main" xmlns:p="http://schemas.openxmlformats.org/presentationml/2006/main" xmlns:r="http://schemas.openxmlformats.org/officeDocument/2006/relationships">
   <p:cSld>
     <p:spTree>
@@ -4260,7 +4342,7 @@
                 </a:solidFill>
                 <a:latin typeface="Arial"/>
               </a:rPr>
-              <a:t>1 / 7</a:t>
+              <a:t>1 / 8</a:t>
             </a:r>
           </a:p>
         </p:txBody>
@@ -4627,7 +4709,7 @@
         </p:nvSpPr>
         <p:spPr>
           <a:xfrm>
-            <a:off x="3103245" y="4381102"/>
+            <a:off x="3103245" y="3955049"/>
             <a:ext cx="6637401" cy="2194274"/>
           </a:xfrm>
           <a:prstGeom prst="rect">
@@ -4670,7 +4752,7 @@
         </p:nvSpPr>
         <p:spPr>
           <a:xfrm>
-            <a:off x="2979801" y="4257658"/>
+            <a:off x="2979801" y="3831605"/>
             <a:ext cx="310896" cy="310896"/>
           </a:xfrm>
           <a:prstGeom prst="ellipse">
@@ -5394,7 +5476,7 @@
                 </a:solidFill>
                 <a:latin typeface="Arial"/>
               </a:rPr>
-              <a:t>The number of profiles determines the controls</a:t>
+              <a:t>One standard across every institute theme</a:t>
             </a:r>
           </a:p>
         </p:txBody>
@@ -5436,7 +5518,7 @@
                 </a:solidFill>
                 <a:latin typeface="Arial"/>
               </a:rPr>
-              <a:t>DRAFT FOR FEEDBACK  ·  Directory + category listings</a:t>
+              <a:t>DRAFT FOR FEEDBACK  ·  Theme-agnostic rules</a:t>
             </a:r>
           </a:p>
         </p:txBody>
@@ -5521,7 +5603,7 @@
                 </a:solidFill>
                 <a:latin typeface="Arial"/>
               </a:rPr>
-              <a:t>2 / 7</a:t>
+              <a:t>2 / 8</a:t>
             </a:r>
           </a:p>
         </p:txBody>
@@ -5534,7 +5616,7 @@
         </p:nvSpPr>
         <p:spPr>
           <a:xfrm>
-            <a:off x="457200" y="1280160"/>
+            <a:off x="457200" y="1325880"/>
             <a:ext cx="4297680" cy="411480"/>
           </a:xfrm>
           <a:prstGeom prst="rect">
@@ -5557,27 +5639,96 @@
               </a:spcAft>
             </a:pPr>
             <a:r>
-              <a:rPr sz="2600" b="1">
+              <a:rPr sz="2400" b="1">
                 <a:solidFill>
                   <a:srgbClr val="0C2340"/>
                 </a:solidFill>
                 <a:latin typeface="Arial"/>
               </a:rPr>
-              <a:t>Up to 24 profiles</a:t>
-            </a:r>
-          </a:p>
-        </p:txBody>
-      </p:sp>
-      <p:sp>
-        <p:nvSpPr>
-          <p:cNvPr id="9" name="TextBox 8"/>
+              <a:t>NDT4</a:t>
+            </a:r>
+          </a:p>
+        </p:txBody>
+      </p:sp>
+      <p:pic>
+        <p:nvPicPr>
+          <p:cNvPr id="9" name="Picture 8" descr="theme-ndt4.png">
+            <a:hlinkClick r:id="rId2"/>
+          </p:cNvPr>
+          <p:cNvPicPr>
+            <a:picLocks noChangeAspect="1"/>
+          </p:cNvPicPr>
+          <p:nvPr/>
+        </p:nvPicPr>
+        <p:blipFill>
+          <a:blip r:embed="rId4"/>
+          <a:stretch>
+            <a:fillRect/>
+          </a:stretch>
+        </p:blipFill>
+        <p:spPr>
+          <a:xfrm>
+            <a:off x="457200" y="1874519"/>
+            <a:ext cx="4251960" cy="2952750"/>
+          </a:xfrm>
+          <a:prstGeom prst="rect">
+            <a:avLst/>
+          </a:prstGeom>
+        </p:spPr>
+      </p:pic>
+      <p:sp>
+        <p:nvSpPr>
+          <p:cNvPr id="10" name="Rectangle 9"/>
+          <p:cNvSpPr/>
+          <p:nvPr/>
+        </p:nvSpPr>
+        <p:spPr>
+          <a:xfrm>
+            <a:off x="457200" y="1874519"/>
+            <a:ext cx="4251960" cy="2952750"/>
+          </a:xfrm>
+          <a:prstGeom prst="rect">
+            <a:avLst/>
+          </a:prstGeom>
+          <a:noFill/>
+          <a:ln w="7620">
+            <a:solidFill>
+              <a:srgbClr val="D5DBDF"/>
+            </a:solidFill>
+          </a:ln>
+        </p:spPr>
+        <p:style>
+          <a:lnRef idx="1">
+            <a:schemeClr val="accent1"/>
+          </a:lnRef>
+          <a:fillRef idx="3">
+            <a:schemeClr val="accent1"/>
+          </a:fillRef>
+          <a:effectRef idx="2">
+            <a:schemeClr val="accent1"/>
+          </a:effectRef>
+          <a:fontRef idx="minor">
+            <a:schemeClr val="lt1"/>
+          </a:fontRef>
+        </p:style>
+        <p:txBody>
+          <a:bodyPr rtlCol="0" anchor="ctr"/>
+          <a:lstStyle/>
+          <a:p>
+            <a:pPr algn="ctr"/>
+          </a:p>
+        </p:txBody>
+      </p:sp>
+      <p:sp>
+        <p:nvSpPr>
+          <p:cNvPr id="11" name="TextBox 10"/>
           <p:cNvSpPr txBox="1"/>
           <p:nvPr/>
         </p:nvSpPr>
         <p:spPr>
           <a:xfrm>
-            <a:off x="457200" y="1810512"/>
-            <a:ext cx="4389120" cy="320040"/>
+            <a:off x="5184648" y="1325880"/>
+            <a:ext cx="4297680" cy="411480"/>
           </a:xfrm>
           <a:prstGeom prst="rect">
             <a:avLst/>
@@ -5599,21 +5750,21 @@
               </a:spcAft>
             </a:pPr>
             <a:r>
-              <a:rPr sz="1400" b="0">
-                <a:solidFill>
-                  <a:srgbClr val="52616D"/>
-                </a:solidFill>
-                <a:latin typeface="Arial"/>
-              </a:rPr>
-              <a:t>All on one page</a:t>
+              <a:rPr sz="2400" b="1">
+                <a:solidFill>
+                  <a:srgbClr val="0C2340"/>
+                </a:solidFill>
+                <a:latin typeface="Arial"/>
+              </a:rPr>
+              <a:t>NDT3</a:t>
             </a:r>
           </a:p>
         </p:txBody>
       </p:sp>
       <p:pic>
         <p:nvPicPr>
-          <p:cNvPr id="10" name="Picture 9" descr="size-24-top.png">
-            <a:hlinkClick r:id="rId5"/>
+          <p:cNvPr id="12" name="Picture 11" descr="theme-ndt3.png">
+            <a:hlinkClick r:id="rId6"/>
           </p:cNvPr>
           <p:cNvPicPr>
             <a:picLocks noChangeAspect="1"/>
@@ -5621,15 +5772,15 @@
           <p:nvPr/>
         </p:nvPicPr>
         <p:blipFill>
-          <a:blip r:embed="rId4"/>
+          <a:blip r:embed="rId5"/>
           <a:stretch>
             <a:fillRect/>
           </a:stretch>
         </p:blipFill>
         <p:spPr>
           <a:xfrm>
-            <a:off x="457200" y="2377440"/>
-            <a:ext cx="4251960" cy="2253538"/>
+            <a:off x="5184648" y="1874519"/>
+            <a:ext cx="4251960" cy="2952750"/>
           </a:xfrm>
           <a:prstGeom prst="rect">
             <a:avLst/>
@@ -5638,14 +5789,14 @@
       </p:pic>
       <p:sp>
         <p:nvSpPr>
-          <p:cNvPr id="11" name="Rectangle 10"/>
+          <p:cNvPr id="13" name="Rectangle 12"/>
           <p:cNvSpPr/>
           <p:nvPr/>
         </p:nvSpPr>
         <p:spPr>
           <a:xfrm>
-            <a:off x="457200" y="2377440"/>
-            <a:ext cx="4251960" cy="2253538"/>
+            <a:off x="5184648" y="1874519"/>
+            <a:ext cx="4251960" cy="2952750"/>
           </a:xfrm>
           <a:prstGeom prst="rect">
             <a:avLst/>
@@ -5681,14 +5832,14 @@
       </p:sp>
       <p:sp>
         <p:nvSpPr>
-          <p:cNvPr id="12" name="TextBox 11"/>
+          <p:cNvPr id="14" name="TextBox 13"/>
           <p:cNvSpPr txBox="1"/>
           <p:nvPr/>
         </p:nvSpPr>
         <p:spPr>
           <a:xfrm>
-            <a:off x="457200" y="5870448"/>
-            <a:ext cx="4297680" cy="457200"/>
+            <a:off x="9912096" y="1325880"/>
+            <a:ext cx="4297680" cy="411480"/>
           </a:xfrm>
           <a:prstGeom prst="rect">
             <a:avLst/>
@@ -5710,15 +5861,107 @@
               </a:spcAft>
             </a:pPr>
             <a:r>
-              <a:rPr sz="1800" b="1">
+              <a:rPr sz="2400" b="1">
                 <a:solidFill>
                   <a:srgbClr val="0C2340"/>
                 </a:solidFill>
                 <a:latin typeface="Arial"/>
               </a:rPr>
-              <a:t>No pagination.</a:t>
-            </a:r>
-          </a:p>
+              <a:t>Theme 2.4</a:t>
+            </a:r>
+          </a:p>
+        </p:txBody>
+      </p:sp>
+      <p:pic>
+        <p:nvPicPr>
+          <p:cNvPr id="15" name="Picture 14" descr="theme-ndt24.png">
+            <a:hlinkClick r:id="rId8"/>
+          </p:cNvPr>
+          <p:cNvPicPr>
+            <a:picLocks noChangeAspect="1"/>
+          </p:cNvPicPr>
+          <p:nvPr/>
+        </p:nvPicPr>
+        <p:blipFill>
+          <a:blip r:embed="rId7"/>
+          <a:stretch>
+            <a:fillRect/>
+          </a:stretch>
+        </p:blipFill>
+        <p:spPr>
+          <a:xfrm>
+            <a:off x="9912096" y="1874519"/>
+            <a:ext cx="4251960" cy="2952750"/>
+          </a:xfrm>
+          <a:prstGeom prst="rect">
+            <a:avLst/>
+          </a:prstGeom>
+        </p:spPr>
+      </p:pic>
+      <p:sp>
+        <p:nvSpPr>
+          <p:cNvPr id="16" name="Rectangle 15"/>
+          <p:cNvSpPr/>
+          <p:nvPr/>
+        </p:nvSpPr>
+        <p:spPr>
+          <a:xfrm>
+            <a:off x="9912096" y="1874519"/>
+            <a:ext cx="4251960" cy="2952750"/>
+          </a:xfrm>
+          <a:prstGeom prst="rect">
+            <a:avLst/>
+          </a:prstGeom>
+          <a:noFill/>
+          <a:ln w="7620">
+            <a:solidFill>
+              <a:srgbClr val="D5DBDF"/>
+            </a:solidFill>
+          </a:ln>
+        </p:spPr>
+        <p:style>
+          <a:lnRef idx="1">
+            <a:schemeClr val="accent1"/>
+          </a:lnRef>
+          <a:fillRef idx="3">
+            <a:schemeClr val="accent1"/>
+          </a:fillRef>
+          <a:effectRef idx="2">
+            <a:schemeClr val="accent1"/>
+          </a:effectRef>
+          <a:fontRef idx="minor">
+            <a:schemeClr val="lt1"/>
+          </a:fontRef>
+        </p:style>
+        <p:txBody>
+          <a:bodyPr rtlCol="0" anchor="ctr"/>
+          <a:lstStyle/>
+          <a:p>
+            <a:pPr algn="ctr"/>
+          </a:p>
+        </p:txBody>
+      </p:sp>
+      <p:sp>
+        <p:nvSpPr>
+          <p:cNvPr id="17" name="TextBox 16"/>
+          <p:cNvSpPr txBox="1"/>
+          <p:nvPr/>
+        </p:nvSpPr>
+        <p:spPr>
+          <a:xfrm>
+            <a:off x="594360" y="5486400"/>
+            <a:ext cx="13441680" cy="274320"/>
+          </a:xfrm>
+          <a:prstGeom prst="rect">
+            <a:avLst/>
+          </a:prstGeom>
+          <a:noFill/>
+        </p:spPr>
+        <p:txBody>
+          <a:bodyPr wrap="square" lIns="0" rIns="0" tIns="0" bIns="0" anchor="t">
+            <a:spAutoFit/>
+          </a:bodyPr>
+          <a:lstStyle/>
           <a:p>
             <a:pPr>
               <a:lnSpc>
@@ -5729,27 +5972,70 @@
               </a:spcAft>
             </a:pPr>
             <a:r>
-              <a:rPr sz="1800" b="1">
-                <a:solidFill>
-                  <a:srgbClr val="0C2340"/>
-                </a:solidFill>
-                <a:latin typeface="Arial"/>
-              </a:rPr>
-              <a:t>No search or filters.</a:t>
-            </a:r>
-          </a:p>
-        </p:txBody>
-      </p:sp>
-      <p:sp>
-        <p:nvSpPr>
-          <p:cNvPr id="13" name="TextBox 12"/>
+              <a:rPr sz="1200" b="1">
+                <a:solidFill>
+                  <a:srgbClr val="52616D"/>
+                </a:solidFill>
+                <a:latin typeface="Arial"/>
+              </a:rPr>
+              <a:t>KEEP EACH THEME’S NATIVE STYLING. USE THE SAME DIRECTORY RULES.</a:t>
+            </a:r>
+          </a:p>
+        </p:txBody>
+      </p:sp>
+      <p:sp>
+        <p:nvSpPr>
+          <p:cNvPr id="18" name="Rectangle 17"/>
+          <p:cNvSpPr/>
+          <p:nvPr/>
+        </p:nvSpPr>
+        <p:spPr>
+          <a:xfrm>
+            <a:off x="457200" y="6080760"/>
+            <a:ext cx="13670280" cy="1143000"/>
+          </a:xfrm>
+          <a:prstGeom prst="rect">
+            <a:avLst/>
+          </a:prstGeom>
+          <a:solidFill>
+            <a:srgbClr val="0C2340"/>
+          </a:solidFill>
+          <a:ln>
+            <a:noFill/>
+          </a:ln>
+        </p:spPr>
+        <p:style>
+          <a:lnRef idx="1">
+            <a:schemeClr val="accent1"/>
+          </a:lnRef>
+          <a:fillRef idx="3">
+            <a:schemeClr val="accent1"/>
+          </a:fillRef>
+          <a:effectRef idx="2">
+            <a:schemeClr val="accent1"/>
+          </a:effectRef>
+          <a:fontRef idx="minor">
+            <a:schemeClr val="lt1"/>
+          </a:fontRef>
+        </p:style>
+        <p:txBody>
+          <a:bodyPr rtlCol="0" anchor="ctr"/>
+          <a:lstStyle/>
+          <a:p>
+            <a:pPr algn="ctr"/>
+          </a:p>
+        </p:txBody>
+      </p:sp>
+      <p:sp>
+        <p:nvSpPr>
+          <p:cNvPr id="19" name="TextBox 18"/>
           <p:cNvSpPr txBox="1"/>
           <p:nvPr/>
         </p:nvSpPr>
         <p:spPr>
           <a:xfrm>
-            <a:off x="5184648" y="1280160"/>
-            <a:ext cx="4297680" cy="411480"/>
+            <a:off x="777240" y="6263640"/>
+            <a:ext cx="12893040" cy="320040"/>
           </a:xfrm>
           <a:prstGeom prst="rect">
             <a:avLst/>
@@ -5771,27 +6057,27 @@
               </a:spcAft>
             </a:pPr>
             <a:r>
-              <a:rPr sz="2600" b="1">
-                <a:solidFill>
-                  <a:srgbClr val="0C2340"/>
-                </a:solidFill>
-                <a:latin typeface="Arial"/>
-              </a:rPr>
-              <a:t>25–40 profiles</a:t>
-            </a:r>
-          </a:p>
-        </p:txBody>
-      </p:sp>
-      <p:sp>
-        <p:nvSpPr>
-          <p:cNvPr id="14" name="TextBox 13"/>
+              <a:rPr sz="2200" b="1">
+                <a:solidFill>
+                  <a:srgbClr val="FFFFFF"/>
+                </a:solidFill>
+                <a:latin typeface="Arial"/>
+              </a:rPr>
+              <a:t>People → People Directory</a:t>
+            </a:r>
+          </a:p>
+        </p:txBody>
+      </p:sp>
+      <p:sp>
+        <p:nvSpPr>
+          <p:cNvPr id="20" name="TextBox 19"/>
           <p:cNvSpPr txBox="1"/>
           <p:nvPr/>
         </p:nvSpPr>
         <p:spPr>
           <a:xfrm>
-            <a:off x="5184648" y="1810512"/>
-            <a:ext cx="4389120" cy="320040"/>
+            <a:off x="777240" y="6766560"/>
+            <a:ext cx="12893040" cy="274320"/>
           </a:xfrm>
           <a:prstGeom prst="rect">
             <a:avLst/>
@@ -5813,673 +6099,14 @@
               </a:spcAft>
             </a:pPr>
             <a:r>
-              <a:rPr sz="1400" b="0">
-                <a:solidFill>
-                  <a:srgbClr val="52616D"/>
-                </a:solidFill>
-                <a:latin typeface="Arial"/>
-              </a:rPr>
-              <a:t>24 per page</a:t>
-            </a:r>
-          </a:p>
-        </p:txBody>
-      </p:sp>
-      <p:pic>
-        <p:nvPicPr>
-          <p:cNvPr id="15" name="Picture 14" descr="size-40-top.png">
-            <a:hlinkClick r:id="rId7"/>
-          </p:cNvPr>
-          <p:cNvPicPr>
-            <a:picLocks noChangeAspect="1"/>
-          </p:cNvPicPr>
-          <p:nvPr/>
-        </p:nvPicPr>
-        <p:blipFill>
-          <a:blip r:embed="rId6"/>
-          <a:stretch>
-            <a:fillRect/>
-          </a:stretch>
-        </p:blipFill>
-        <p:spPr>
-          <a:xfrm>
-            <a:off x="5184648" y="2377440"/>
-            <a:ext cx="4251960" cy="2253538"/>
-          </a:xfrm>
-          <a:prstGeom prst="rect">
-            <a:avLst/>
-          </a:prstGeom>
-        </p:spPr>
-      </p:pic>
-      <p:sp>
-        <p:nvSpPr>
-          <p:cNvPr id="16" name="Rectangle 15"/>
-          <p:cNvSpPr/>
-          <p:nvPr/>
-        </p:nvSpPr>
-        <p:spPr>
-          <a:xfrm>
-            <a:off x="5184648" y="2377440"/>
-            <a:ext cx="4251960" cy="2253538"/>
-          </a:xfrm>
-          <a:prstGeom prst="rect">
-            <a:avLst/>
-          </a:prstGeom>
-          <a:noFill/>
-          <a:ln w="7620">
-            <a:solidFill>
-              <a:srgbClr val="D5DBDF"/>
-            </a:solidFill>
-          </a:ln>
-        </p:spPr>
-        <p:style>
-          <a:lnRef idx="1">
-            <a:schemeClr val="accent1"/>
-          </a:lnRef>
-          <a:fillRef idx="3">
-            <a:schemeClr val="accent1"/>
-          </a:fillRef>
-          <a:effectRef idx="2">
-            <a:schemeClr val="accent1"/>
-          </a:effectRef>
-          <a:fontRef idx="minor">
-            <a:schemeClr val="lt1"/>
-          </a:fontRef>
-        </p:style>
-        <p:txBody>
-          <a:bodyPr rtlCol="0" anchor="ctr"/>
-          <a:lstStyle/>
-          <a:p>
-            <a:pPr algn="ctr"/>
-          </a:p>
-        </p:txBody>
-      </p:sp>
-      <p:sp>
-        <p:nvSpPr>
-          <p:cNvPr id="17" name="TextBox 16"/>
-          <p:cNvSpPr txBox="1"/>
-          <p:nvPr/>
-        </p:nvSpPr>
-        <p:spPr>
-          <a:xfrm>
-            <a:off x="5184648" y="5532120"/>
-            <a:ext cx="4206240" cy="228600"/>
-          </a:xfrm>
-          <a:prstGeom prst="rect">
-            <a:avLst/>
-          </a:prstGeom>
-          <a:noFill/>
-        </p:spPr>
-        <p:txBody>
-          <a:bodyPr wrap="square" lIns="0" rIns="0" tIns="0" bIns="0" anchor="t">
-            <a:spAutoFit/>
-          </a:bodyPr>
-          <a:lstStyle/>
-          <a:p>
-            <a:pPr>
-              <a:lnSpc>
-                <a:spcPct val="115000"/>
-              </a:lnSpc>
-              <a:spcAft>
-                <a:spcPts val="0"/>
-              </a:spcAft>
-            </a:pPr>
-            <a:r>
-              <a:rPr sz="1000" b="1">
-                <a:solidFill>
-                  <a:srgbClr val="52616D"/>
-                </a:solidFill>
-                <a:latin typeface="Arial"/>
-              </a:rPr>
-              <a:t>BOTTOM OF THE LIST</a:t>
-            </a:r>
-          </a:p>
-        </p:txBody>
-      </p:sp>
-      <p:pic>
-        <p:nvPicPr>
-          <p:cNvPr id="18" name="Picture 17" descr="size-40-bottom.png">
-            <a:hlinkClick r:id="rId7"/>
-          </p:cNvPr>
-          <p:cNvPicPr>
-            <a:picLocks noChangeAspect="1"/>
-          </p:cNvPicPr>
-          <p:nvPr/>
-        </p:nvPicPr>
-        <p:blipFill>
-          <a:blip r:embed="rId8"/>
-          <a:srcRect l="25000" r="25000" t="11538" b="19231"/>
-          <a:stretch>
-            <a:fillRect/>
-          </a:stretch>
-        </p:blipFill>
-        <p:spPr>
-          <a:xfrm>
-            <a:off x="5184648" y="5925312"/>
-            <a:ext cx="4251960" cy="765352"/>
-          </a:xfrm>
-          <a:prstGeom prst="rect">
-            <a:avLst/>
-          </a:prstGeom>
-        </p:spPr>
-      </p:pic>
-      <p:sp>
-        <p:nvSpPr>
-          <p:cNvPr id="19" name="Rectangle 18"/>
-          <p:cNvSpPr/>
-          <p:nvPr/>
-        </p:nvSpPr>
-        <p:spPr>
-          <a:xfrm>
-            <a:off x="5184648" y="5925312"/>
-            <a:ext cx="4251960" cy="765352"/>
-          </a:xfrm>
-          <a:prstGeom prst="rect">
-            <a:avLst/>
-          </a:prstGeom>
-          <a:noFill/>
-          <a:ln w="7620">
-            <a:solidFill>
-              <a:srgbClr val="D5DBDF"/>
-            </a:solidFill>
-          </a:ln>
-        </p:spPr>
-        <p:style>
-          <a:lnRef idx="1">
-            <a:schemeClr val="accent1"/>
-          </a:lnRef>
-          <a:fillRef idx="3">
-            <a:schemeClr val="accent1"/>
-          </a:fillRef>
-          <a:effectRef idx="2">
-            <a:schemeClr val="accent1"/>
-          </a:effectRef>
-          <a:fontRef idx="minor">
-            <a:schemeClr val="lt1"/>
-          </a:fontRef>
-        </p:style>
-        <p:txBody>
-          <a:bodyPr rtlCol="0" anchor="ctr"/>
-          <a:lstStyle/>
-          <a:p>
-            <a:pPr algn="ctr"/>
-          </a:p>
-        </p:txBody>
-      </p:sp>
-      <p:sp>
-        <p:nvSpPr>
-          <p:cNvPr id="20" name="Rectangle 19"/>
-          <p:cNvSpPr/>
-          <p:nvPr/>
-        </p:nvSpPr>
-        <p:spPr>
-          <a:xfrm>
-            <a:off x="5148072" y="5879592"/>
-            <a:ext cx="4325112" cy="859536"/>
-          </a:xfrm>
-          <a:prstGeom prst="rect">
-            <a:avLst/>
-          </a:prstGeom>
-          <a:noFill/>
-          <a:ln w="25400">
-            <a:solidFill>
-              <a:srgbClr val="AE9142"/>
-            </a:solidFill>
-          </a:ln>
-        </p:spPr>
-        <p:style>
-          <a:lnRef idx="1">
-            <a:schemeClr val="accent1"/>
-          </a:lnRef>
-          <a:fillRef idx="3">
-            <a:schemeClr val="accent1"/>
-          </a:fillRef>
-          <a:effectRef idx="2">
-            <a:schemeClr val="accent1"/>
-          </a:effectRef>
-          <a:fontRef idx="minor">
-            <a:schemeClr val="lt1"/>
-          </a:fontRef>
-        </p:style>
-        <p:txBody>
-          <a:bodyPr rtlCol="0" anchor="ctr"/>
-          <a:lstStyle/>
-          <a:p>
-            <a:pPr algn="ctr"/>
-          </a:p>
-        </p:txBody>
-      </p:sp>
-      <p:sp>
-        <p:nvSpPr>
-          <p:cNvPr id="21" name="TextBox 20"/>
-          <p:cNvSpPr txBox="1"/>
-          <p:nvPr/>
-        </p:nvSpPr>
-        <p:spPr>
-          <a:xfrm>
-            <a:off x="5184648" y="6949440"/>
-            <a:ext cx="4389120" cy="365760"/>
-          </a:xfrm>
-          <a:prstGeom prst="rect">
-            <a:avLst/>
-          </a:prstGeom>
-          <a:noFill/>
-        </p:spPr>
-        <p:txBody>
-          <a:bodyPr wrap="square" lIns="0" rIns="0" tIns="0" bIns="0" anchor="t">
-            <a:spAutoFit/>
-          </a:bodyPr>
-          <a:lstStyle/>
-          <a:p>
-            <a:pPr>
-              <a:lnSpc>
-                <a:spcPct val="115000"/>
-              </a:lnSpc>
-              <a:spcAft>
-                <a:spcPts val="0"/>
-              </a:spcAft>
-            </a:pPr>
-            <a:r>
-              <a:rPr sz="1200" b="1">
-                <a:solidFill>
-                  <a:srgbClr val="0C2340"/>
-                </a:solidFill>
-                <a:latin typeface="Arial"/>
-              </a:rPr>
-              <a:t>Numbered pagination below the grid</a:t>
-            </a:r>
-          </a:p>
-        </p:txBody>
-      </p:sp>
-      <p:sp>
-        <p:nvSpPr>
-          <p:cNvPr id="22" name="TextBox 21"/>
-          <p:cNvSpPr txBox="1"/>
-          <p:nvPr/>
-        </p:nvSpPr>
-        <p:spPr>
-          <a:xfrm>
-            <a:off x="9912096" y="1280160"/>
-            <a:ext cx="4297680" cy="411480"/>
-          </a:xfrm>
-          <a:prstGeom prst="rect">
-            <a:avLst/>
-          </a:prstGeom>
-          <a:noFill/>
-        </p:spPr>
-        <p:txBody>
-          <a:bodyPr wrap="square" lIns="0" rIns="0" tIns="0" bIns="0" anchor="t">
-            <a:spAutoFit/>
-          </a:bodyPr>
-          <a:lstStyle/>
-          <a:p>
-            <a:pPr>
-              <a:lnSpc>
-                <a:spcPct val="115000"/>
-              </a:lnSpc>
-              <a:spcAft>
-                <a:spcPts val="0"/>
-              </a:spcAft>
-            </a:pPr>
-            <a:r>
-              <a:rPr sz="2600" b="1">
-                <a:solidFill>
-                  <a:srgbClr val="0C2340"/>
-                </a:solidFill>
-                <a:latin typeface="Arial"/>
-              </a:rPr>
-              <a:t>More than 40 profiles</a:t>
-            </a:r>
-          </a:p>
-        </p:txBody>
-      </p:sp>
-      <p:sp>
-        <p:nvSpPr>
-          <p:cNvPr id="23" name="TextBox 22"/>
-          <p:cNvSpPr txBox="1"/>
-          <p:nvPr/>
-        </p:nvSpPr>
-        <p:spPr>
-          <a:xfrm>
-            <a:off x="9912096" y="1810512"/>
-            <a:ext cx="4389120" cy="320040"/>
-          </a:xfrm>
-          <a:prstGeom prst="rect">
-            <a:avLst/>
-          </a:prstGeom>
-          <a:noFill/>
-        </p:spPr>
-        <p:txBody>
-          <a:bodyPr wrap="square" lIns="0" rIns="0" tIns="0" bIns="0" anchor="t">
-            <a:spAutoFit/>
-          </a:bodyPr>
-          <a:lstStyle/>
-          <a:p>
-            <a:pPr>
-              <a:lnSpc>
-                <a:spcPct val="115000"/>
-              </a:lnSpc>
-              <a:spcAft>
-                <a:spcPts val="0"/>
-              </a:spcAft>
-            </a:pPr>
-            <a:r>
-              <a:rPr sz="1400" b="0">
-                <a:solidFill>
-                  <a:srgbClr val="52616D"/>
-                </a:solidFill>
-                <a:latin typeface="Arial"/>
-              </a:rPr>
-              <a:t>24 per page + search / filters</a:t>
-            </a:r>
-          </a:p>
-        </p:txBody>
-      </p:sp>
-      <p:pic>
-        <p:nvPicPr>
-          <p:cNvPr id="24" name="Picture 23" descr="size-60-top.png">
-            <a:hlinkClick r:id="rId10"/>
-          </p:cNvPr>
-          <p:cNvPicPr>
-            <a:picLocks noChangeAspect="1"/>
-          </p:cNvPicPr>
-          <p:nvPr/>
-        </p:nvPicPr>
-        <p:blipFill>
-          <a:blip r:embed="rId9"/>
-          <a:stretch>
-            <a:fillRect/>
-          </a:stretch>
-        </p:blipFill>
-        <p:spPr>
-          <a:xfrm>
-            <a:off x="9912096" y="2377440"/>
-            <a:ext cx="4251960" cy="2806293"/>
-          </a:xfrm>
-          <a:prstGeom prst="rect">
-            <a:avLst/>
-          </a:prstGeom>
-        </p:spPr>
-      </p:pic>
-      <p:sp>
-        <p:nvSpPr>
-          <p:cNvPr id="25" name="Rectangle 24"/>
-          <p:cNvSpPr/>
-          <p:nvPr/>
-        </p:nvSpPr>
-        <p:spPr>
-          <a:xfrm>
-            <a:off x="9912096" y="2377440"/>
-            <a:ext cx="4251960" cy="2806293"/>
-          </a:xfrm>
-          <a:prstGeom prst="rect">
-            <a:avLst/>
-          </a:prstGeom>
-          <a:noFill/>
-          <a:ln w="7620">
-            <a:solidFill>
-              <a:srgbClr val="D5DBDF"/>
-            </a:solidFill>
-          </a:ln>
-        </p:spPr>
-        <p:style>
-          <a:lnRef idx="1">
-            <a:schemeClr val="accent1"/>
-          </a:lnRef>
-          <a:fillRef idx="3">
-            <a:schemeClr val="accent1"/>
-          </a:fillRef>
-          <a:effectRef idx="2">
-            <a:schemeClr val="accent1"/>
-          </a:effectRef>
-          <a:fontRef idx="minor">
-            <a:schemeClr val="lt1"/>
-          </a:fontRef>
-        </p:style>
-        <p:txBody>
-          <a:bodyPr rtlCol="0" anchor="ctr"/>
-          <a:lstStyle/>
-          <a:p>
-            <a:pPr algn="ctr"/>
-          </a:p>
-        </p:txBody>
-      </p:sp>
-      <p:sp>
-        <p:nvSpPr>
-          <p:cNvPr id="26" name="TextBox 25"/>
-          <p:cNvSpPr txBox="1"/>
-          <p:nvPr/>
-        </p:nvSpPr>
-        <p:spPr>
-          <a:xfrm>
-            <a:off x="9912096" y="5532120"/>
-            <a:ext cx="4206240" cy="228600"/>
-          </a:xfrm>
-          <a:prstGeom prst="rect">
-            <a:avLst/>
-          </a:prstGeom>
-          <a:noFill/>
-        </p:spPr>
-        <p:txBody>
-          <a:bodyPr wrap="square" lIns="0" rIns="0" tIns="0" bIns="0" anchor="t">
-            <a:spAutoFit/>
-          </a:bodyPr>
-          <a:lstStyle/>
-          <a:p>
-            <a:pPr>
-              <a:lnSpc>
-                <a:spcPct val="115000"/>
-              </a:lnSpc>
-              <a:spcAft>
-                <a:spcPts val="0"/>
-              </a:spcAft>
-            </a:pPr>
-            <a:r>
-              <a:rPr sz="1000" b="1">
-                <a:solidFill>
-                  <a:srgbClr val="52616D"/>
-                </a:solidFill>
-                <a:latin typeface="Arial"/>
-              </a:rPr>
-              <a:t>BOTTOM OF THE LIST</a:t>
-            </a:r>
-          </a:p>
-        </p:txBody>
-      </p:sp>
-      <p:pic>
-        <p:nvPicPr>
-          <p:cNvPr id="27" name="Picture 26" descr="size-60-bottom.png">
-            <a:hlinkClick r:id="rId10"/>
-          </p:cNvPr>
-          <p:cNvPicPr>
-            <a:picLocks noChangeAspect="1"/>
-          </p:cNvPicPr>
-          <p:nvPr/>
-        </p:nvPicPr>
-        <p:blipFill>
-          <a:blip r:embed="rId11"/>
-          <a:srcRect l="25000" r="25000" t="11538" b="19231"/>
-          <a:stretch>
-            <a:fillRect/>
-          </a:stretch>
-        </p:blipFill>
-        <p:spPr>
-          <a:xfrm>
-            <a:off x="9912096" y="5925312"/>
-            <a:ext cx="4251960" cy="765352"/>
-          </a:xfrm>
-          <a:prstGeom prst="rect">
-            <a:avLst/>
-          </a:prstGeom>
-        </p:spPr>
-      </p:pic>
-      <p:sp>
-        <p:nvSpPr>
-          <p:cNvPr id="28" name="Rectangle 27"/>
-          <p:cNvSpPr/>
-          <p:nvPr/>
-        </p:nvSpPr>
-        <p:spPr>
-          <a:xfrm>
-            <a:off x="9912096" y="5925312"/>
-            <a:ext cx="4251960" cy="765352"/>
-          </a:xfrm>
-          <a:prstGeom prst="rect">
-            <a:avLst/>
-          </a:prstGeom>
-          <a:noFill/>
-          <a:ln w="7620">
-            <a:solidFill>
-              <a:srgbClr val="D5DBDF"/>
-            </a:solidFill>
-          </a:ln>
-        </p:spPr>
-        <p:style>
-          <a:lnRef idx="1">
-            <a:schemeClr val="accent1"/>
-          </a:lnRef>
-          <a:fillRef idx="3">
-            <a:schemeClr val="accent1"/>
-          </a:fillRef>
-          <a:effectRef idx="2">
-            <a:schemeClr val="accent1"/>
-          </a:effectRef>
-          <a:fontRef idx="minor">
-            <a:schemeClr val="lt1"/>
-          </a:fontRef>
-        </p:style>
-        <p:txBody>
-          <a:bodyPr rtlCol="0" anchor="ctr"/>
-          <a:lstStyle/>
-          <a:p>
-            <a:pPr algn="ctr"/>
-          </a:p>
-        </p:txBody>
-      </p:sp>
-      <p:sp>
-        <p:nvSpPr>
-          <p:cNvPr id="29" name="Rectangle 28"/>
-          <p:cNvSpPr/>
-          <p:nvPr/>
-        </p:nvSpPr>
-        <p:spPr>
-          <a:xfrm>
-            <a:off x="9875520" y="5879592"/>
-            <a:ext cx="4325112" cy="859536"/>
-          </a:xfrm>
-          <a:prstGeom prst="rect">
-            <a:avLst/>
-          </a:prstGeom>
-          <a:noFill/>
-          <a:ln w="25400">
-            <a:solidFill>
-              <a:srgbClr val="AE9142"/>
-            </a:solidFill>
-          </a:ln>
-        </p:spPr>
-        <p:style>
-          <a:lnRef idx="1">
-            <a:schemeClr val="accent1"/>
-          </a:lnRef>
-          <a:fillRef idx="3">
-            <a:schemeClr val="accent1"/>
-          </a:fillRef>
-          <a:effectRef idx="2">
-            <a:schemeClr val="accent1"/>
-          </a:effectRef>
-          <a:fontRef idx="minor">
-            <a:schemeClr val="lt1"/>
-          </a:fontRef>
-        </p:style>
-        <p:txBody>
-          <a:bodyPr rtlCol="0" anchor="ctr"/>
-          <a:lstStyle/>
-          <a:p>
-            <a:pPr algn="ctr"/>
-          </a:p>
-        </p:txBody>
-      </p:sp>
-      <p:sp>
-        <p:nvSpPr>
-          <p:cNvPr id="30" name="TextBox 29"/>
-          <p:cNvSpPr txBox="1"/>
-          <p:nvPr/>
-        </p:nvSpPr>
-        <p:spPr>
-          <a:xfrm>
-            <a:off x="9912096" y="6949440"/>
-            <a:ext cx="4389120" cy="365760"/>
-          </a:xfrm>
-          <a:prstGeom prst="rect">
-            <a:avLst/>
-          </a:prstGeom>
-          <a:noFill/>
-        </p:spPr>
-        <p:txBody>
-          <a:bodyPr wrap="square" lIns="0" rIns="0" tIns="0" bIns="0" anchor="t">
-            <a:spAutoFit/>
-          </a:bodyPr>
-          <a:lstStyle/>
-          <a:p>
-            <a:pPr>
-              <a:lnSpc>
-                <a:spcPct val="115000"/>
-              </a:lnSpc>
-              <a:spcAft>
-                <a:spcPts val="0"/>
-              </a:spcAft>
-            </a:pPr>
-            <a:r>
-              <a:rPr sz="1200" b="1">
-                <a:solidFill>
-                  <a:srgbClr val="0C2340"/>
-                </a:solidFill>
-                <a:latin typeface="Arial"/>
-              </a:rPr>
-              <a:t>Numbered pagination below the grid</a:t>
-            </a:r>
-          </a:p>
-        </p:txBody>
-      </p:sp>
-      <p:sp>
-        <p:nvSpPr>
-          <p:cNvPr id="31" name="Rectangle 30"/>
-          <p:cNvSpPr/>
-          <p:nvPr/>
-        </p:nvSpPr>
-        <p:spPr>
-          <a:xfrm>
-            <a:off x="9875520" y="3063240"/>
-            <a:ext cx="4325112" cy="1298448"/>
-          </a:xfrm>
-          <a:prstGeom prst="rect">
-            <a:avLst/>
-          </a:prstGeom>
-          <a:noFill/>
-          <a:ln w="25400">
-            <a:solidFill>
-              <a:srgbClr val="AE9142"/>
-            </a:solidFill>
-          </a:ln>
-        </p:spPr>
-        <p:style>
-          <a:lnRef idx="1">
-            <a:schemeClr val="accent1"/>
-          </a:lnRef>
-          <a:fillRef idx="3">
-            <a:schemeClr val="accent1"/>
-          </a:fillRef>
-          <a:effectRef idx="2">
-            <a:schemeClr val="accent1"/>
-          </a:effectRef>
-          <a:fontRef idx="minor">
-            <a:schemeClr val="lt1"/>
-          </a:fontRef>
-        </p:style>
-        <p:txBody>
-          <a:bodyPr rtlCol="0" anchor="ctr"/>
-          <a:lstStyle/>
-          <a:p>
-            <a:pPr algn="ctr"/>
+              <a:rPr sz="1700" b="0">
+                <a:solidFill>
+                  <a:srgbClr val="FFFFFF"/>
+                </a:solidFill>
+                <a:latin typeface="Arial"/>
+              </a:rPr>
+              <a:t>Five sidebar groups  ·  Four desktop columns  ·  Same profile destinations</a:t>
+            </a:r>
           </a:p>
         </p:txBody>
       </p:sp>
@@ -6623,7 +6250,7 @@
                 </a:solidFill>
                 <a:latin typeface="Arial"/>
               </a:rPr>
-              <a:t>A category opens its default group</a:t>
+              <a:t>The number of profiles determines the controls</a:t>
             </a:r>
           </a:p>
         </p:txBody>
@@ -6665,7 +6292,7 @@
                 </a:solidFill>
                 <a:latin typeface="Arial"/>
               </a:rPr>
-              <a:t>DRAFT FOR FEEDBACK  ·  Browse by group</a:t>
+              <a:t>DRAFT FOR FEEDBACK  ·  Directory + category listings</a:t>
             </a:r>
           </a:p>
         </p:txBody>
@@ -6750,427 +6377,21 @@
                 </a:solidFill>
                 <a:latin typeface="Arial"/>
               </a:rPr>
-              <a:t>3 / 7</a:t>
-            </a:r>
-          </a:p>
-        </p:txBody>
-      </p:sp>
-      <p:pic>
-        <p:nvPicPr>
-          <p:cNvPr id="8" name="Picture 7" descr="category.png">
-            <a:hlinkClick r:id="rId2"/>
-          </p:cNvPr>
-          <p:cNvPicPr>
-            <a:picLocks noChangeAspect="1"/>
-          </p:cNvPicPr>
-          <p:nvPr/>
-        </p:nvPicPr>
-        <p:blipFill>
-          <a:blip r:embed="rId4"/>
-          <a:stretch>
-            <a:fillRect/>
-          </a:stretch>
-        </p:blipFill>
-        <p:spPr>
-          <a:xfrm>
-            <a:off x="457200" y="1143000"/>
-            <a:ext cx="9738360" cy="6086475"/>
-          </a:xfrm>
-          <a:prstGeom prst="rect">
-            <a:avLst/>
-          </a:prstGeom>
-        </p:spPr>
-      </p:pic>
-      <p:sp>
-        <p:nvSpPr>
-          <p:cNvPr id="9" name="Rectangle 8"/>
-          <p:cNvSpPr/>
-          <p:nvPr/>
-        </p:nvSpPr>
-        <p:spPr>
-          <a:xfrm>
-            <a:off x="457200" y="1143000"/>
-            <a:ext cx="9738360" cy="6086475"/>
-          </a:xfrm>
-          <a:prstGeom prst="rect">
-            <a:avLst/>
-          </a:prstGeom>
-          <a:noFill/>
-          <a:ln w="7620">
-            <a:solidFill>
-              <a:srgbClr val="D5DBDF"/>
-            </a:solidFill>
-          </a:ln>
-        </p:spPr>
-        <p:style>
-          <a:lnRef idx="1">
-            <a:schemeClr val="accent1"/>
-          </a:lnRef>
-          <a:fillRef idx="3">
-            <a:schemeClr val="accent1"/>
-          </a:fillRef>
-          <a:effectRef idx="2">
-            <a:schemeClr val="accent1"/>
-          </a:effectRef>
-          <a:fontRef idx="minor">
-            <a:schemeClr val="lt1"/>
-          </a:fontRef>
-        </p:style>
-        <p:txBody>
-          <a:bodyPr rtlCol="0" anchor="ctr"/>
-          <a:lstStyle/>
-          <a:p>
-            <a:pPr algn="ctr"/>
-          </a:p>
-        </p:txBody>
-      </p:sp>
-      <p:sp>
-        <p:nvSpPr>
-          <p:cNvPr id="10" name="Rectangle 9"/>
-          <p:cNvSpPr/>
-          <p:nvPr/>
-        </p:nvSpPr>
-        <p:spPr>
-          <a:xfrm>
-            <a:off x="3103245" y="2750962"/>
-            <a:ext cx="6637401" cy="558005"/>
-          </a:xfrm>
-          <a:prstGeom prst="rect">
-            <a:avLst/>
-          </a:prstGeom>
-          <a:noFill/>
-          <a:ln w="25400">
-            <a:solidFill>
-              <a:srgbClr val="AE9142"/>
-            </a:solidFill>
-          </a:ln>
-        </p:spPr>
-        <p:style>
-          <a:lnRef idx="1">
-            <a:schemeClr val="accent1"/>
-          </a:lnRef>
-          <a:fillRef idx="3">
-            <a:schemeClr val="accent1"/>
-          </a:fillRef>
-          <a:effectRef idx="2">
-            <a:schemeClr val="accent1"/>
-          </a:effectRef>
-          <a:fontRef idx="minor">
-            <a:schemeClr val="lt1"/>
-          </a:fontRef>
-        </p:style>
-        <p:txBody>
-          <a:bodyPr rtlCol="0" anchor="ctr"/>
-          <a:lstStyle/>
-          <a:p>
-            <a:pPr algn="ctr"/>
-          </a:p>
-        </p:txBody>
-      </p:sp>
-      <p:sp>
-        <p:nvSpPr>
-          <p:cNvPr id="11" name="Oval 10"/>
-          <p:cNvSpPr/>
-          <p:nvPr/>
-        </p:nvSpPr>
-        <p:spPr>
-          <a:xfrm>
-            <a:off x="2979801" y="2627518"/>
-            <a:ext cx="310896" cy="310896"/>
-          </a:xfrm>
-          <a:prstGeom prst="ellipse">
-            <a:avLst/>
-          </a:prstGeom>
-          <a:solidFill>
-            <a:srgbClr val="0C2340"/>
-          </a:solidFill>
-          <a:ln>
-            <a:noFill/>
-          </a:ln>
-        </p:spPr>
-        <p:style>
-          <a:lnRef idx="1">
-            <a:schemeClr val="accent1"/>
-          </a:lnRef>
-          <a:fillRef idx="3">
-            <a:schemeClr val="accent1"/>
-          </a:fillRef>
-          <a:effectRef idx="2">
-            <a:schemeClr val="accent1"/>
-          </a:effectRef>
-          <a:fontRef idx="minor">
-            <a:schemeClr val="lt1"/>
-          </a:fontRef>
-        </p:style>
-        <p:txBody>
-          <a:bodyPr rtlCol="0" anchor="ctr" lIns="0" rIns="0" tIns="0" bIns="0"/>
-          <a:lstStyle/>
-          <a:p>
-            <a:pPr algn="ctr"/>
-            <a:r>
-              <a:rPr sz="1300" b="1">
-                <a:solidFill>
-                  <a:srgbClr val="FFFFFF"/>
-                </a:solidFill>
-                <a:latin typeface="Arial"/>
-              </a:rPr>
-              <a:t>1</a:t>
-            </a:r>
-          </a:p>
-        </p:txBody>
-      </p:sp>
-      <p:sp>
-        <p:nvSpPr>
-          <p:cNvPr id="12" name="Rectangle 11"/>
-          <p:cNvSpPr/>
-          <p:nvPr/>
-        </p:nvSpPr>
-        <p:spPr>
-          <a:xfrm>
-            <a:off x="912114" y="3075469"/>
-            <a:ext cx="1930527" cy="992829"/>
-          </a:xfrm>
-          <a:prstGeom prst="rect">
-            <a:avLst/>
-          </a:prstGeom>
-          <a:noFill/>
-          <a:ln w="25400">
-            <a:solidFill>
-              <a:srgbClr val="AE9142"/>
-            </a:solidFill>
-          </a:ln>
-        </p:spPr>
-        <p:style>
-          <a:lnRef idx="1">
-            <a:schemeClr val="accent1"/>
-          </a:lnRef>
-          <a:fillRef idx="3">
-            <a:schemeClr val="accent1"/>
-          </a:fillRef>
-          <a:effectRef idx="2">
-            <a:schemeClr val="accent1"/>
-          </a:effectRef>
-          <a:fontRef idx="minor">
-            <a:schemeClr val="lt1"/>
-          </a:fontRef>
-        </p:style>
-        <p:txBody>
-          <a:bodyPr rtlCol="0" anchor="ctr"/>
-          <a:lstStyle/>
-          <a:p>
-            <a:pPr algn="ctr"/>
-          </a:p>
-        </p:txBody>
-      </p:sp>
-      <p:sp>
-        <p:nvSpPr>
-          <p:cNvPr id="13" name="Oval 12"/>
-          <p:cNvSpPr/>
-          <p:nvPr/>
-        </p:nvSpPr>
-        <p:spPr>
-          <a:xfrm>
-            <a:off x="788670" y="2952025"/>
-            <a:ext cx="310896" cy="310896"/>
-          </a:xfrm>
-          <a:prstGeom prst="ellipse">
-            <a:avLst/>
-          </a:prstGeom>
-          <a:solidFill>
-            <a:srgbClr val="0C2340"/>
-          </a:solidFill>
-          <a:ln>
-            <a:noFill/>
-          </a:ln>
-        </p:spPr>
-        <p:style>
-          <a:lnRef idx="1">
-            <a:schemeClr val="accent1"/>
-          </a:lnRef>
-          <a:fillRef idx="3">
-            <a:schemeClr val="accent1"/>
-          </a:fillRef>
-          <a:effectRef idx="2">
-            <a:schemeClr val="accent1"/>
-          </a:effectRef>
-          <a:fontRef idx="minor">
-            <a:schemeClr val="lt1"/>
-          </a:fontRef>
-        </p:style>
-        <p:txBody>
-          <a:bodyPr rtlCol="0" anchor="ctr" lIns="0" rIns="0" tIns="0" bIns="0"/>
-          <a:lstStyle/>
-          <a:p>
-            <a:pPr algn="ctr"/>
-            <a:r>
-              <a:rPr sz="1300" b="1">
-                <a:solidFill>
-                  <a:srgbClr val="FFFFFF"/>
-                </a:solidFill>
-                <a:latin typeface="Arial"/>
-              </a:rPr>
-              <a:t>2</a:t>
-            </a:r>
-          </a:p>
-        </p:txBody>
-      </p:sp>
-      <p:sp>
-        <p:nvSpPr>
-          <p:cNvPr id="14" name="Rectangle 13"/>
-          <p:cNvSpPr/>
-          <p:nvPr/>
-        </p:nvSpPr>
-        <p:spPr>
-          <a:xfrm>
-            <a:off x="3103245" y="3955049"/>
-            <a:ext cx="1484185" cy="2518886"/>
-          </a:xfrm>
-          <a:prstGeom prst="rect">
-            <a:avLst/>
-          </a:prstGeom>
-          <a:noFill/>
-          <a:ln w="25400">
-            <a:solidFill>
-              <a:srgbClr val="AE9142"/>
-            </a:solidFill>
-          </a:ln>
-        </p:spPr>
-        <p:style>
-          <a:lnRef idx="1">
-            <a:schemeClr val="accent1"/>
-          </a:lnRef>
-          <a:fillRef idx="3">
-            <a:schemeClr val="accent1"/>
-          </a:fillRef>
-          <a:effectRef idx="2">
-            <a:schemeClr val="accent1"/>
-          </a:effectRef>
-          <a:fontRef idx="minor">
-            <a:schemeClr val="lt1"/>
-          </a:fontRef>
-        </p:style>
-        <p:txBody>
-          <a:bodyPr rtlCol="0" anchor="ctr"/>
-          <a:lstStyle/>
-          <a:p>
-            <a:pPr algn="ctr"/>
-          </a:p>
-        </p:txBody>
-      </p:sp>
-      <p:sp>
-        <p:nvSpPr>
-          <p:cNvPr id="15" name="Oval 14"/>
-          <p:cNvSpPr/>
-          <p:nvPr/>
-        </p:nvSpPr>
-        <p:spPr>
-          <a:xfrm>
-            <a:off x="2979801" y="3831605"/>
-            <a:ext cx="310896" cy="310896"/>
-          </a:xfrm>
-          <a:prstGeom prst="ellipse">
-            <a:avLst/>
-          </a:prstGeom>
-          <a:solidFill>
-            <a:srgbClr val="0C2340"/>
-          </a:solidFill>
-          <a:ln>
-            <a:noFill/>
-          </a:ln>
-        </p:spPr>
-        <p:style>
-          <a:lnRef idx="1">
-            <a:schemeClr val="accent1"/>
-          </a:lnRef>
-          <a:fillRef idx="3">
-            <a:schemeClr val="accent1"/>
-          </a:fillRef>
-          <a:effectRef idx="2">
-            <a:schemeClr val="accent1"/>
-          </a:effectRef>
-          <a:fontRef idx="minor">
-            <a:schemeClr val="lt1"/>
-          </a:fontRef>
-        </p:style>
-        <p:txBody>
-          <a:bodyPr rtlCol="0" anchor="ctr" lIns="0" rIns="0" tIns="0" bIns="0"/>
-          <a:lstStyle/>
-          <a:p>
-            <a:pPr algn="ctr"/>
-            <a:r>
-              <a:rPr sz="1300" b="1">
-                <a:solidFill>
-                  <a:srgbClr val="FFFFFF"/>
-                </a:solidFill>
-                <a:latin typeface="Arial"/>
-              </a:rPr>
-              <a:t>3</a:t>
-            </a:r>
-          </a:p>
-        </p:txBody>
-      </p:sp>
-      <p:sp>
-        <p:nvSpPr>
-          <p:cNvPr id="16" name="Oval 15"/>
-          <p:cNvSpPr/>
-          <p:nvPr/>
-        </p:nvSpPr>
-        <p:spPr>
-          <a:xfrm>
-            <a:off x="10497312" y="1527048"/>
-            <a:ext cx="310896" cy="310896"/>
-          </a:xfrm>
-          <a:prstGeom prst="ellipse">
-            <a:avLst/>
-          </a:prstGeom>
-          <a:solidFill>
-            <a:srgbClr val="0C2340"/>
-          </a:solidFill>
-          <a:ln>
-            <a:noFill/>
-          </a:ln>
-        </p:spPr>
-        <p:style>
-          <a:lnRef idx="1">
-            <a:schemeClr val="accent1"/>
-          </a:lnRef>
-          <a:fillRef idx="3">
-            <a:schemeClr val="accent1"/>
-          </a:fillRef>
-          <a:effectRef idx="2">
-            <a:schemeClr val="accent1"/>
-          </a:effectRef>
-          <a:fontRef idx="minor">
-            <a:schemeClr val="lt1"/>
-          </a:fontRef>
-        </p:style>
-        <p:txBody>
-          <a:bodyPr rtlCol="0" anchor="ctr" lIns="0" rIns="0" tIns="0" bIns="0"/>
-          <a:lstStyle/>
-          <a:p>
-            <a:pPr algn="ctr"/>
-            <a:r>
-              <a:rPr sz="1300" b="1">
-                <a:solidFill>
-                  <a:srgbClr val="FFFFFF"/>
-                </a:solidFill>
-                <a:latin typeface="Arial"/>
-              </a:rPr>
-              <a:t>1</a:t>
-            </a:r>
-          </a:p>
-        </p:txBody>
-      </p:sp>
-      <p:sp>
-        <p:nvSpPr>
-          <p:cNvPr id="17" name="TextBox 16"/>
+              <a:t>3 / 8</a:t>
+            </a:r>
+          </a:p>
+        </p:txBody>
+      </p:sp>
+      <p:sp>
+        <p:nvSpPr>
+          <p:cNvPr id="8" name="TextBox 7"/>
           <p:cNvSpPr txBox="1"/>
           <p:nvPr/>
         </p:nvSpPr>
         <p:spPr>
           <a:xfrm>
-            <a:off x="10972800" y="1554480"/>
-            <a:ext cx="3200400" cy="502920"/>
+            <a:off x="457200" y="1280160"/>
+            <a:ext cx="4297680" cy="411480"/>
           </a:xfrm>
           <a:prstGeom prst="rect">
             <a:avLst/>
@@ -7192,27 +6413,27 @@
               </a:spcAft>
             </a:pPr>
             <a:r>
-              <a:rPr sz="1800" b="1">
+              <a:rPr sz="2600" b="1">
                 <a:solidFill>
                   <a:srgbClr val="0C2340"/>
                 </a:solidFill>
                 <a:latin typeface="Arial"/>
               </a:rPr>
-              <a:t>Just “Faculty”</a:t>
-            </a:r>
-          </a:p>
-        </p:txBody>
-      </p:sp>
-      <p:sp>
-        <p:nvSpPr>
-          <p:cNvPr id="18" name="TextBox 17"/>
+              <a:t>Up to 24 profiles</a:t>
+            </a:r>
+          </a:p>
+        </p:txBody>
+      </p:sp>
+      <p:sp>
+        <p:nvSpPr>
+          <p:cNvPr id="9" name="TextBox 8"/>
           <p:cNvSpPr txBox="1"/>
           <p:nvPr/>
         </p:nvSpPr>
         <p:spPr>
           <a:xfrm>
-            <a:off x="10972800" y="2139696"/>
-            <a:ext cx="3154680" cy="914400"/>
+            <a:off x="457200" y="1810512"/>
+            <a:ext cx="4389120" cy="320040"/>
           </a:xfrm>
           <a:prstGeom prst="rect">
             <a:avLst/>
@@ -7240,9 +6461,101 @@
                 </a:solidFill>
                 <a:latin typeface="Arial"/>
               </a:rPr>
-              <a:t>No lede.</a:t>
-            </a:r>
-          </a:p>
+              <a:t>All on one page</a:t>
+            </a:r>
+          </a:p>
+        </p:txBody>
+      </p:sp>
+      <p:pic>
+        <p:nvPicPr>
+          <p:cNvPr id="10" name="Picture 9" descr="size-24-top.png">
+            <a:hlinkClick r:id="rId5"/>
+          </p:cNvPr>
+          <p:cNvPicPr>
+            <a:picLocks noChangeAspect="1"/>
+          </p:cNvPicPr>
+          <p:nvPr/>
+        </p:nvPicPr>
+        <p:blipFill>
+          <a:blip r:embed="rId4"/>
+          <a:stretch>
+            <a:fillRect/>
+          </a:stretch>
+        </p:blipFill>
+        <p:spPr>
+          <a:xfrm>
+            <a:off x="457200" y="2377440"/>
+            <a:ext cx="4251960" cy="2253538"/>
+          </a:xfrm>
+          <a:prstGeom prst="rect">
+            <a:avLst/>
+          </a:prstGeom>
+        </p:spPr>
+      </p:pic>
+      <p:sp>
+        <p:nvSpPr>
+          <p:cNvPr id="11" name="Rectangle 10"/>
+          <p:cNvSpPr/>
+          <p:nvPr/>
+        </p:nvSpPr>
+        <p:spPr>
+          <a:xfrm>
+            <a:off x="457200" y="2377440"/>
+            <a:ext cx="4251960" cy="2253538"/>
+          </a:xfrm>
+          <a:prstGeom prst="rect">
+            <a:avLst/>
+          </a:prstGeom>
+          <a:noFill/>
+          <a:ln w="7620">
+            <a:solidFill>
+              <a:srgbClr val="D5DBDF"/>
+            </a:solidFill>
+          </a:ln>
+        </p:spPr>
+        <p:style>
+          <a:lnRef idx="1">
+            <a:schemeClr val="accent1"/>
+          </a:lnRef>
+          <a:fillRef idx="3">
+            <a:schemeClr val="accent1"/>
+          </a:fillRef>
+          <a:effectRef idx="2">
+            <a:schemeClr val="accent1"/>
+          </a:effectRef>
+          <a:fontRef idx="minor">
+            <a:schemeClr val="lt1"/>
+          </a:fontRef>
+        </p:style>
+        <p:txBody>
+          <a:bodyPr rtlCol="0" anchor="ctr"/>
+          <a:lstStyle/>
+          <a:p>
+            <a:pPr algn="ctr"/>
+          </a:p>
+        </p:txBody>
+      </p:sp>
+      <p:sp>
+        <p:nvSpPr>
+          <p:cNvPr id="12" name="TextBox 11"/>
+          <p:cNvSpPr txBox="1"/>
+          <p:nvPr/>
+        </p:nvSpPr>
+        <p:spPr>
+          <a:xfrm>
+            <a:off x="457200" y="5870448"/>
+            <a:ext cx="4297680" cy="457200"/>
+          </a:xfrm>
+          <a:prstGeom prst="rect">
+            <a:avLst/>
+          </a:prstGeom>
+          <a:noFill/>
+        </p:spPr>
+        <p:txBody>
+          <a:bodyPr wrap="square" lIns="0" rIns="0" tIns="0" bIns="0" anchor="t">
+            <a:spAutoFit/>
+          </a:bodyPr>
+          <a:lstStyle/>
           <a:p>
             <a:pPr>
               <a:lnSpc>
@@ -7253,90 +6566,15 @@
               </a:spcAft>
             </a:pPr>
             <a:r>
-              <a:rPr sz="1400" b="0">
-                <a:solidFill>
-                  <a:srgbClr val="52616D"/>
-                </a:solidFill>
-                <a:latin typeface="Arial"/>
-              </a:rPr>
-              <a:t>No repeated group heading.</a:t>
-            </a:r>
-          </a:p>
-        </p:txBody>
-      </p:sp>
-      <p:sp>
-        <p:nvSpPr>
-          <p:cNvPr id="19" name="Oval 18"/>
-          <p:cNvSpPr/>
-          <p:nvPr/>
-        </p:nvSpPr>
-        <p:spPr>
-          <a:xfrm>
-            <a:off x="10497312" y="3218688"/>
-            <a:ext cx="310896" cy="310896"/>
-          </a:xfrm>
-          <a:prstGeom prst="ellipse">
-            <a:avLst/>
-          </a:prstGeom>
-          <a:solidFill>
-            <a:srgbClr val="0C2340"/>
-          </a:solidFill>
-          <a:ln>
-            <a:noFill/>
-          </a:ln>
-        </p:spPr>
-        <p:style>
-          <a:lnRef idx="1">
-            <a:schemeClr val="accent1"/>
-          </a:lnRef>
-          <a:fillRef idx="3">
-            <a:schemeClr val="accent1"/>
-          </a:fillRef>
-          <a:effectRef idx="2">
-            <a:schemeClr val="accent1"/>
-          </a:effectRef>
-          <a:fontRef idx="minor">
-            <a:schemeClr val="lt1"/>
-          </a:fontRef>
-        </p:style>
-        <p:txBody>
-          <a:bodyPr rtlCol="0" anchor="ctr" lIns="0" rIns="0" tIns="0" bIns="0"/>
-          <a:lstStyle/>
-          <a:p>
-            <a:pPr algn="ctr"/>
-            <a:r>
-              <a:rPr sz="1300" b="1">
-                <a:solidFill>
-                  <a:srgbClr val="FFFFFF"/>
-                </a:solidFill>
-                <a:latin typeface="Arial"/>
-              </a:rPr>
-              <a:t>2</a:t>
-            </a:r>
-          </a:p>
-        </p:txBody>
-      </p:sp>
-      <p:sp>
-        <p:nvSpPr>
-          <p:cNvPr id="20" name="TextBox 19"/>
-          <p:cNvSpPr txBox="1"/>
-          <p:nvPr/>
-        </p:nvSpPr>
-        <p:spPr>
-          <a:xfrm>
-            <a:off x="10972800" y="3246120"/>
-            <a:ext cx="3200400" cy="502920"/>
-          </a:xfrm>
-          <a:prstGeom prst="rect">
-            <a:avLst/>
-          </a:prstGeom>
-          <a:noFill/>
-        </p:spPr>
-        <p:txBody>
-          <a:bodyPr wrap="square" lIns="0" rIns="0" tIns="0" bIns="0" anchor="t">
-            <a:spAutoFit/>
-          </a:bodyPr>
-          <a:lstStyle/>
+              <a:rPr sz="1800" b="1">
+                <a:solidFill>
+                  <a:srgbClr val="0C2340"/>
+                </a:solidFill>
+                <a:latin typeface="Arial"/>
+              </a:rPr>
+              <a:t>No pagination.</a:t>
+            </a:r>
+          </a:p>
           <a:p>
             <a:pPr>
               <a:lnSpc>
@@ -7353,21 +6591,21 @@
                 </a:solidFill>
                 <a:latin typeface="Arial"/>
               </a:rPr>
-              <a:t>Reveal its subgroups</a:t>
-            </a:r>
-          </a:p>
-        </p:txBody>
-      </p:sp>
-      <p:sp>
-        <p:nvSpPr>
-          <p:cNvPr id="21" name="TextBox 20"/>
+              <a:t>No search or filters.</a:t>
+            </a:r>
+          </a:p>
+        </p:txBody>
+      </p:sp>
+      <p:sp>
+        <p:nvSpPr>
+          <p:cNvPr id="13" name="TextBox 12"/>
           <p:cNvSpPr txBox="1"/>
           <p:nvPr/>
         </p:nvSpPr>
         <p:spPr>
           <a:xfrm>
-            <a:off x="10972800" y="3831335"/>
-            <a:ext cx="3154680" cy="914400"/>
+            <a:off x="5184648" y="1280160"/>
+            <a:ext cx="4297680" cy="411480"/>
           </a:xfrm>
           <a:prstGeom prst="rect">
             <a:avLst/>
@@ -7389,15 +6627,38 @@
               </a:spcAft>
             </a:pPr>
             <a:r>
-              <a:rPr sz="1400" b="0">
-                <a:solidFill>
-                  <a:srgbClr val="52616D"/>
-                </a:solidFill>
-                <a:latin typeface="Arial"/>
-              </a:rPr>
-              <a:t>Other categories</a:t>
-            </a:r>
-          </a:p>
+              <a:rPr sz="2600" b="1">
+                <a:solidFill>
+                  <a:srgbClr val="0C2340"/>
+                </a:solidFill>
+                <a:latin typeface="Arial"/>
+              </a:rPr>
+              <a:t>25–40 profiles</a:t>
+            </a:r>
+          </a:p>
+        </p:txBody>
+      </p:sp>
+      <p:sp>
+        <p:nvSpPr>
+          <p:cNvPr id="14" name="TextBox 13"/>
+          <p:cNvSpPr txBox="1"/>
+          <p:nvPr/>
+        </p:nvSpPr>
+        <p:spPr>
+          <a:xfrm>
+            <a:off x="5184648" y="1810512"/>
+            <a:ext cx="4389120" cy="320040"/>
+          </a:xfrm>
+          <a:prstGeom prst="rect">
+            <a:avLst/>
+          </a:prstGeom>
+          <a:noFill/>
+        </p:spPr>
+        <p:txBody>
+          <a:bodyPr wrap="square" lIns="0" rIns="0" tIns="0" bIns="0" anchor="t">
+            <a:spAutoFit/>
+          </a:bodyPr>
+          <a:lstStyle/>
           <a:p>
             <a:pPr>
               <a:lnSpc>
@@ -7414,30 +6675,56 @@
                 </a:solidFill>
                 <a:latin typeface="Arial"/>
               </a:rPr>
-              <a:t>stay collapsed.</a:t>
-            </a:r>
-          </a:p>
-        </p:txBody>
-      </p:sp>
-      <p:sp>
-        <p:nvSpPr>
-          <p:cNvPr id="22" name="Oval 21"/>
+              <a:t>24 per page</a:t>
+            </a:r>
+          </a:p>
+        </p:txBody>
+      </p:sp>
+      <p:pic>
+        <p:nvPicPr>
+          <p:cNvPr id="15" name="Picture 14" descr="size-24-top.png">
+            <a:hlinkClick r:id="rId6"/>
+          </p:cNvPr>
+          <p:cNvPicPr>
+            <a:picLocks noChangeAspect="1"/>
+          </p:cNvPicPr>
+          <p:nvPr/>
+        </p:nvPicPr>
+        <p:blipFill>
+          <a:blip r:embed="rId4"/>
+          <a:stretch>
+            <a:fillRect/>
+          </a:stretch>
+        </p:blipFill>
+        <p:spPr>
+          <a:xfrm>
+            <a:off x="5184648" y="2377440"/>
+            <a:ext cx="4251960" cy="2253538"/>
+          </a:xfrm>
+          <a:prstGeom prst="rect">
+            <a:avLst/>
+          </a:prstGeom>
+        </p:spPr>
+      </p:pic>
+      <p:sp>
+        <p:nvSpPr>
+          <p:cNvPr id="16" name="Rectangle 15"/>
           <p:cNvSpPr/>
           <p:nvPr/>
         </p:nvSpPr>
         <p:spPr>
           <a:xfrm>
-            <a:off x="10497312" y="4956048"/>
-            <a:ext cx="310896" cy="310896"/>
-          </a:xfrm>
-          <a:prstGeom prst="ellipse">
-            <a:avLst/>
-          </a:prstGeom>
-          <a:solidFill>
-            <a:srgbClr val="0C2340"/>
-          </a:solidFill>
-          <a:ln>
-            <a:noFill/>
+            <a:off x="5184648" y="2377440"/>
+            <a:ext cx="4251960" cy="2253538"/>
+          </a:xfrm>
+          <a:prstGeom prst="rect">
+            <a:avLst/>
+          </a:prstGeom>
+          <a:noFill/>
+          <a:ln w="7620">
+            <a:solidFill>
+              <a:srgbClr val="D5DBDF"/>
+            </a:solidFill>
           </a:ln>
         </p:spPr>
         <p:style>
@@ -7455,32 +6742,23 @@
           </a:fontRef>
         </p:style>
         <p:txBody>
-          <a:bodyPr rtlCol="0" anchor="ctr" lIns="0" rIns="0" tIns="0" bIns="0"/>
+          <a:bodyPr rtlCol="0" anchor="ctr"/>
           <a:lstStyle/>
           <a:p>
             <a:pPr algn="ctr"/>
-            <a:r>
-              <a:rPr sz="1300" b="1">
-                <a:solidFill>
-                  <a:srgbClr val="FFFFFF"/>
-                </a:solidFill>
-                <a:latin typeface="Arial"/>
-              </a:rPr>
-              <a:t>3</a:t>
-            </a:r>
-          </a:p>
-        </p:txBody>
-      </p:sp>
-      <p:sp>
-        <p:nvSpPr>
-          <p:cNvPr id="23" name="TextBox 22"/>
+          </a:p>
+        </p:txBody>
+      </p:sp>
+      <p:sp>
+        <p:nvSpPr>
+          <p:cNvPr id="17" name="TextBox 16"/>
           <p:cNvSpPr txBox="1"/>
           <p:nvPr/>
         </p:nvSpPr>
         <p:spPr>
           <a:xfrm>
-            <a:off x="10972800" y="4983480"/>
-            <a:ext cx="3200400" cy="502920"/>
+            <a:off x="5184648" y="5532120"/>
+            <a:ext cx="4206240" cy="228600"/>
           </a:xfrm>
           <a:prstGeom prst="rect">
             <a:avLst/>
@@ -7502,27 +6780,140 @@
               </a:spcAft>
             </a:pPr>
             <a:r>
-              <a:rPr sz="1800" b="1">
-                <a:solidFill>
-                  <a:srgbClr val="0C2340"/>
-                </a:solidFill>
-                <a:latin typeface="Arial"/>
-              </a:rPr>
-              <a:t>Show core affiliates</a:t>
-            </a:r>
-          </a:p>
-        </p:txBody>
-      </p:sp>
-      <p:sp>
-        <p:nvSpPr>
-          <p:cNvPr id="24" name="TextBox 23"/>
+              <a:rPr sz="1000" b="1">
+                <a:solidFill>
+                  <a:srgbClr val="52616D"/>
+                </a:solidFill>
+                <a:latin typeface="Arial"/>
+              </a:rPr>
+              <a:t>BOTTOM OF THE LIST</a:t>
+            </a:r>
+          </a:p>
+        </p:txBody>
+      </p:sp>
+      <p:pic>
+        <p:nvPicPr>
+          <p:cNvPr id="18" name="Picture 17" descr="size-40-bottom.png">
+            <a:hlinkClick r:id="rId6"/>
+          </p:cNvPr>
+          <p:cNvPicPr>
+            <a:picLocks noChangeAspect="1"/>
+          </p:cNvPicPr>
+          <p:nvPr/>
+        </p:nvPicPr>
+        <p:blipFill>
+          <a:blip r:embed="rId7"/>
+          <a:srcRect l="25000" r="25000" t="11538" b="19231"/>
+          <a:stretch>
+            <a:fillRect/>
+          </a:stretch>
+        </p:blipFill>
+        <p:spPr>
+          <a:xfrm>
+            <a:off x="5184648" y="5925312"/>
+            <a:ext cx="4251960" cy="765352"/>
+          </a:xfrm>
+          <a:prstGeom prst="rect">
+            <a:avLst/>
+          </a:prstGeom>
+        </p:spPr>
+      </p:pic>
+      <p:sp>
+        <p:nvSpPr>
+          <p:cNvPr id="19" name="Rectangle 18"/>
+          <p:cNvSpPr/>
+          <p:nvPr/>
+        </p:nvSpPr>
+        <p:spPr>
+          <a:xfrm>
+            <a:off x="5184648" y="5925312"/>
+            <a:ext cx="4251960" cy="765352"/>
+          </a:xfrm>
+          <a:prstGeom prst="rect">
+            <a:avLst/>
+          </a:prstGeom>
+          <a:noFill/>
+          <a:ln w="7620">
+            <a:solidFill>
+              <a:srgbClr val="D5DBDF"/>
+            </a:solidFill>
+          </a:ln>
+        </p:spPr>
+        <p:style>
+          <a:lnRef idx="1">
+            <a:schemeClr val="accent1"/>
+          </a:lnRef>
+          <a:fillRef idx="3">
+            <a:schemeClr val="accent1"/>
+          </a:fillRef>
+          <a:effectRef idx="2">
+            <a:schemeClr val="accent1"/>
+          </a:effectRef>
+          <a:fontRef idx="minor">
+            <a:schemeClr val="lt1"/>
+          </a:fontRef>
+        </p:style>
+        <p:txBody>
+          <a:bodyPr rtlCol="0" anchor="ctr"/>
+          <a:lstStyle/>
+          <a:p>
+            <a:pPr algn="ctr"/>
+          </a:p>
+        </p:txBody>
+      </p:sp>
+      <p:sp>
+        <p:nvSpPr>
+          <p:cNvPr id="20" name="Rectangle 19"/>
+          <p:cNvSpPr/>
+          <p:nvPr/>
+        </p:nvSpPr>
+        <p:spPr>
+          <a:xfrm>
+            <a:off x="5148072" y="5879592"/>
+            <a:ext cx="4325112" cy="859536"/>
+          </a:xfrm>
+          <a:prstGeom prst="rect">
+            <a:avLst/>
+          </a:prstGeom>
+          <a:noFill/>
+          <a:ln w="25400">
+            <a:solidFill>
+              <a:srgbClr val="AE9142"/>
+            </a:solidFill>
+          </a:ln>
+        </p:spPr>
+        <p:style>
+          <a:lnRef idx="1">
+            <a:schemeClr val="accent1"/>
+          </a:lnRef>
+          <a:fillRef idx="3">
+            <a:schemeClr val="accent1"/>
+          </a:fillRef>
+          <a:effectRef idx="2">
+            <a:schemeClr val="accent1"/>
+          </a:effectRef>
+          <a:fontRef idx="minor">
+            <a:schemeClr val="lt1"/>
+          </a:fontRef>
+        </p:style>
+        <p:txBody>
+          <a:bodyPr rtlCol="0" anchor="ctr"/>
+          <a:lstStyle/>
+          <a:p>
+            <a:pPr algn="ctr"/>
+          </a:p>
+        </p:txBody>
+      </p:sp>
+      <p:sp>
+        <p:nvSpPr>
+          <p:cNvPr id="21" name="TextBox 20"/>
           <p:cNvSpPr txBox="1"/>
           <p:nvPr/>
         </p:nvSpPr>
         <p:spPr>
           <a:xfrm>
-            <a:off x="10972800" y="5568696"/>
-            <a:ext cx="3154680" cy="914400"/>
+            <a:off x="5184648" y="6949440"/>
+            <a:ext cx="4389120" cy="365760"/>
           </a:xfrm>
           <a:prstGeom prst="rect">
             <a:avLst/>
@@ -7544,15 +6935,38 @@
               </a:spcAft>
             </a:pPr>
             <a:r>
-              <a:rPr sz="1400" b="0">
-                <a:solidFill>
-                  <a:srgbClr val="52616D"/>
-                </a:solidFill>
-                <a:latin typeface="Arial"/>
-              </a:rPr>
-              <a:t>No separate “Core”</a:t>
-            </a:r>
-          </a:p>
+              <a:rPr sz="1200" b="1">
+                <a:solidFill>
+                  <a:srgbClr val="0C2340"/>
+                </a:solidFill>
+                <a:latin typeface="Arial"/>
+              </a:rPr>
+              <a:t>Numbered pagination below the grid</a:t>
+            </a:r>
+          </a:p>
+        </p:txBody>
+      </p:sp>
+      <p:sp>
+        <p:nvSpPr>
+          <p:cNvPr id="22" name="TextBox 21"/>
+          <p:cNvSpPr txBox="1"/>
+          <p:nvPr/>
+        </p:nvSpPr>
+        <p:spPr>
+          <a:xfrm>
+            <a:off x="9912096" y="1280160"/>
+            <a:ext cx="4297680" cy="411480"/>
+          </a:xfrm>
+          <a:prstGeom prst="rect">
+            <a:avLst/>
+          </a:prstGeom>
+          <a:noFill/>
+        </p:spPr>
+        <p:txBody>
+          <a:bodyPr wrap="square" lIns="0" rIns="0" tIns="0" bIns="0" anchor="t">
+            <a:spAutoFit/>
+          </a:bodyPr>
+          <a:lstStyle/>
           <a:p>
             <a:pPr>
               <a:lnSpc>
@@ -7563,14 +6977,365 @@
               </a:spcAft>
             </a:pPr>
             <a:r>
+              <a:rPr sz="2600" b="1">
+                <a:solidFill>
+                  <a:srgbClr val="0C2340"/>
+                </a:solidFill>
+                <a:latin typeface="Arial"/>
+              </a:rPr>
+              <a:t>More than 40 profiles</a:t>
+            </a:r>
+          </a:p>
+        </p:txBody>
+      </p:sp>
+      <p:sp>
+        <p:nvSpPr>
+          <p:cNvPr id="23" name="TextBox 22"/>
+          <p:cNvSpPr txBox="1"/>
+          <p:nvPr/>
+        </p:nvSpPr>
+        <p:spPr>
+          <a:xfrm>
+            <a:off x="9912096" y="1810512"/>
+            <a:ext cx="4389120" cy="320040"/>
+          </a:xfrm>
+          <a:prstGeom prst="rect">
+            <a:avLst/>
+          </a:prstGeom>
+          <a:noFill/>
+        </p:spPr>
+        <p:txBody>
+          <a:bodyPr wrap="square" lIns="0" rIns="0" tIns="0" bIns="0" anchor="t">
+            <a:spAutoFit/>
+          </a:bodyPr>
+          <a:lstStyle/>
+          <a:p>
+            <a:pPr>
+              <a:lnSpc>
+                <a:spcPct val="115000"/>
+              </a:lnSpc>
+              <a:spcAft>
+                <a:spcPts val="0"/>
+              </a:spcAft>
+            </a:pPr>
+            <a:r>
               <a:rPr sz="1400" b="0">
                 <a:solidFill>
                   <a:srgbClr val="52616D"/>
                 </a:solidFill>
                 <a:latin typeface="Arial"/>
               </a:rPr>
-              <a:t>page or heading needed.</a:t>
-            </a:r>
+              <a:t>24 per page + search / filters</a:t>
+            </a:r>
+          </a:p>
+        </p:txBody>
+      </p:sp>
+      <p:pic>
+        <p:nvPicPr>
+          <p:cNvPr id="24" name="Picture 23" descr="size-60-top.png">
+            <a:hlinkClick r:id="rId9"/>
+          </p:cNvPr>
+          <p:cNvPicPr>
+            <a:picLocks noChangeAspect="1"/>
+          </p:cNvPicPr>
+          <p:nvPr/>
+        </p:nvPicPr>
+        <p:blipFill>
+          <a:blip r:embed="rId8"/>
+          <a:stretch>
+            <a:fillRect/>
+          </a:stretch>
+        </p:blipFill>
+        <p:spPr>
+          <a:xfrm>
+            <a:off x="9912096" y="2377440"/>
+            <a:ext cx="4251960" cy="2806293"/>
+          </a:xfrm>
+          <a:prstGeom prst="rect">
+            <a:avLst/>
+          </a:prstGeom>
+        </p:spPr>
+      </p:pic>
+      <p:sp>
+        <p:nvSpPr>
+          <p:cNvPr id="25" name="Rectangle 24"/>
+          <p:cNvSpPr/>
+          <p:nvPr/>
+        </p:nvSpPr>
+        <p:spPr>
+          <a:xfrm>
+            <a:off x="9912096" y="2377440"/>
+            <a:ext cx="4251960" cy="2806293"/>
+          </a:xfrm>
+          <a:prstGeom prst="rect">
+            <a:avLst/>
+          </a:prstGeom>
+          <a:noFill/>
+          <a:ln w="7620">
+            <a:solidFill>
+              <a:srgbClr val="D5DBDF"/>
+            </a:solidFill>
+          </a:ln>
+        </p:spPr>
+        <p:style>
+          <a:lnRef idx="1">
+            <a:schemeClr val="accent1"/>
+          </a:lnRef>
+          <a:fillRef idx="3">
+            <a:schemeClr val="accent1"/>
+          </a:fillRef>
+          <a:effectRef idx="2">
+            <a:schemeClr val="accent1"/>
+          </a:effectRef>
+          <a:fontRef idx="minor">
+            <a:schemeClr val="lt1"/>
+          </a:fontRef>
+        </p:style>
+        <p:txBody>
+          <a:bodyPr rtlCol="0" anchor="ctr"/>
+          <a:lstStyle/>
+          <a:p>
+            <a:pPr algn="ctr"/>
+          </a:p>
+        </p:txBody>
+      </p:sp>
+      <p:sp>
+        <p:nvSpPr>
+          <p:cNvPr id="26" name="TextBox 25"/>
+          <p:cNvSpPr txBox="1"/>
+          <p:nvPr/>
+        </p:nvSpPr>
+        <p:spPr>
+          <a:xfrm>
+            <a:off x="9912096" y="5532120"/>
+            <a:ext cx="4206240" cy="228600"/>
+          </a:xfrm>
+          <a:prstGeom prst="rect">
+            <a:avLst/>
+          </a:prstGeom>
+          <a:noFill/>
+        </p:spPr>
+        <p:txBody>
+          <a:bodyPr wrap="square" lIns="0" rIns="0" tIns="0" bIns="0" anchor="t">
+            <a:spAutoFit/>
+          </a:bodyPr>
+          <a:lstStyle/>
+          <a:p>
+            <a:pPr>
+              <a:lnSpc>
+                <a:spcPct val="115000"/>
+              </a:lnSpc>
+              <a:spcAft>
+                <a:spcPts val="0"/>
+              </a:spcAft>
+            </a:pPr>
+            <a:r>
+              <a:rPr sz="1000" b="1">
+                <a:solidFill>
+                  <a:srgbClr val="52616D"/>
+                </a:solidFill>
+                <a:latin typeface="Arial"/>
+              </a:rPr>
+              <a:t>BOTTOM OF THE LIST</a:t>
+            </a:r>
+          </a:p>
+        </p:txBody>
+      </p:sp>
+      <p:pic>
+        <p:nvPicPr>
+          <p:cNvPr id="27" name="Picture 26" descr="size-60-bottom.png">
+            <a:hlinkClick r:id="rId9"/>
+          </p:cNvPr>
+          <p:cNvPicPr>
+            <a:picLocks noChangeAspect="1"/>
+          </p:cNvPicPr>
+          <p:nvPr/>
+        </p:nvPicPr>
+        <p:blipFill>
+          <a:blip r:embed="rId10"/>
+          <a:srcRect l="25000" r="25000" t="11538" b="19231"/>
+          <a:stretch>
+            <a:fillRect/>
+          </a:stretch>
+        </p:blipFill>
+        <p:spPr>
+          <a:xfrm>
+            <a:off x="9912096" y="5925312"/>
+            <a:ext cx="4251960" cy="765352"/>
+          </a:xfrm>
+          <a:prstGeom prst="rect">
+            <a:avLst/>
+          </a:prstGeom>
+        </p:spPr>
+      </p:pic>
+      <p:sp>
+        <p:nvSpPr>
+          <p:cNvPr id="28" name="Rectangle 27"/>
+          <p:cNvSpPr/>
+          <p:nvPr/>
+        </p:nvSpPr>
+        <p:spPr>
+          <a:xfrm>
+            <a:off x="9912096" y="5925312"/>
+            <a:ext cx="4251960" cy="765352"/>
+          </a:xfrm>
+          <a:prstGeom prst="rect">
+            <a:avLst/>
+          </a:prstGeom>
+          <a:noFill/>
+          <a:ln w="7620">
+            <a:solidFill>
+              <a:srgbClr val="D5DBDF"/>
+            </a:solidFill>
+          </a:ln>
+        </p:spPr>
+        <p:style>
+          <a:lnRef idx="1">
+            <a:schemeClr val="accent1"/>
+          </a:lnRef>
+          <a:fillRef idx="3">
+            <a:schemeClr val="accent1"/>
+          </a:fillRef>
+          <a:effectRef idx="2">
+            <a:schemeClr val="accent1"/>
+          </a:effectRef>
+          <a:fontRef idx="minor">
+            <a:schemeClr val="lt1"/>
+          </a:fontRef>
+        </p:style>
+        <p:txBody>
+          <a:bodyPr rtlCol="0" anchor="ctr"/>
+          <a:lstStyle/>
+          <a:p>
+            <a:pPr algn="ctr"/>
+          </a:p>
+        </p:txBody>
+      </p:sp>
+      <p:sp>
+        <p:nvSpPr>
+          <p:cNvPr id="29" name="Rectangle 28"/>
+          <p:cNvSpPr/>
+          <p:nvPr/>
+        </p:nvSpPr>
+        <p:spPr>
+          <a:xfrm>
+            <a:off x="9875520" y="5879592"/>
+            <a:ext cx="4325112" cy="859536"/>
+          </a:xfrm>
+          <a:prstGeom prst="rect">
+            <a:avLst/>
+          </a:prstGeom>
+          <a:noFill/>
+          <a:ln w="25400">
+            <a:solidFill>
+              <a:srgbClr val="AE9142"/>
+            </a:solidFill>
+          </a:ln>
+        </p:spPr>
+        <p:style>
+          <a:lnRef idx="1">
+            <a:schemeClr val="accent1"/>
+          </a:lnRef>
+          <a:fillRef idx="3">
+            <a:schemeClr val="accent1"/>
+          </a:fillRef>
+          <a:effectRef idx="2">
+            <a:schemeClr val="accent1"/>
+          </a:effectRef>
+          <a:fontRef idx="minor">
+            <a:schemeClr val="lt1"/>
+          </a:fontRef>
+        </p:style>
+        <p:txBody>
+          <a:bodyPr rtlCol="0" anchor="ctr"/>
+          <a:lstStyle/>
+          <a:p>
+            <a:pPr algn="ctr"/>
+          </a:p>
+        </p:txBody>
+      </p:sp>
+      <p:sp>
+        <p:nvSpPr>
+          <p:cNvPr id="30" name="TextBox 29"/>
+          <p:cNvSpPr txBox="1"/>
+          <p:nvPr/>
+        </p:nvSpPr>
+        <p:spPr>
+          <a:xfrm>
+            <a:off x="9912096" y="6949440"/>
+            <a:ext cx="4389120" cy="365760"/>
+          </a:xfrm>
+          <a:prstGeom prst="rect">
+            <a:avLst/>
+          </a:prstGeom>
+          <a:noFill/>
+        </p:spPr>
+        <p:txBody>
+          <a:bodyPr wrap="square" lIns="0" rIns="0" tIns="0" bIns="0" anchor="t">
+            <a:spAutoFit/>
+          </a:bodyPr>
+          <a:lstStyle/>
+          <a:p>
+            <a:pPr>
+              <a:lnSpc>
+                <a:spcPct val="115000"/>
+              </a:lnSpc>
+              <a:spcAft>
+                <a:spcPts val="0"/>
+              </a:spcAft>
+            </a:pPr>
+            <a:r>
+              <a:rPr sz="1200" b="1">
+                <a:solidFill>
+                  <a:srgbClr val="0C2340"/>
+                </a:solidFill>
+                <a:latin typeface="Arial"/>
+              </a:rPr>
+              <a:t>Numbered pagination below the grid</a:t>
+            </a:r>
+          </a:p>
+        </p:txBody>
+      </p:sp>
+      <p:sp>
+        <p:nvSpPr>
+          <p:cNvPr id="31" name="Rectangle 30"/>
+          <p:cNvSpPr/>
+          <p:nvPr/>
+        </p:nvSpPr>
+        <p:spPr>
+          <a:xfrm>
+            <a:off x="9875520" y="3063240"/>
+            <a:ext cx="4325112" cy="1298448"/>
+          </a:xfrm>
+          <a:prstGeom prst="rect">
+            <a:avLst/>
+          </a:prstGeom>
+          <a:noFill/>
+          <a:ln w="25400">
+            <a:solidFill>
+              <a:srgbClr val="AE9142"/>
+            </a:solidFill>
+          </a:ln>
+        </p:spPr>
+        <p:style>
+          <a:lnRef idx="1">
+            <a:schemeClr val="accent1"/>
+          </a:lnRef>
+          <a:fillRef idx="3">
+            <a:schemeClr val="accent1"/>
+          </a:fillRef>
+          <a:effectRef idx="2">
+            <a:schemeClr val="accent1"/>
+          </a:effectRef>
+          <a:fontRef idx="minor">
+            <a:schemeClr val="lt1"/>
+          </a:fontRef>
+        </p:style>
+        <p:txBody>
+          <a:bodyPr rtlCol="0" anchor="ctr"/>
+          <a:lstStyle/>
+          <a:p>
+            <a:pPr algn="ctr"/>
           </a:p>
         </p:txBody>
       </p:sp>
@@ -7714,7 +7479,7 @@
                 </a:solidFill>
                 <a:latin typeface="Arial"/>
               </a:rPr>
-              <a:t>A school-hosted profile opens directly</a:t>
+              <a:t>A category opens its default group</a:t>
             </a:r>
           </a:p>
         </p:txBody>
@@ -7756,7 +7521,7 @@
                 </a:solidFill>
                 <a:latin typeface="Arial"/>
               </a:rPr>
-              <a:t>DRAFT FOR FEEDBACK  ·  Profile destination 1</a:t>
+              <a:t>DRAFT FOR FEEDBACK  ·  Browse by group</a:t>
             </a:r>
           </a:p>
         </p:txBody>
@@ -7841,14 +7606,14 @@
                 </a:solidFill>
                 <a:latin typeface="Arial"/>
               </a:rPr>
-              <a:t>4 / 7</a:t>
+              <a:t>4 / 8</a:t>
             </a:r>
           </a:p>
         </p:txBody>
       </p:sp>
       <p:pic>
         <p:nvPicPr>
-          <p:cNvPr id="8" name="Picture 7" descr="external.png">
+          <p:cNvPr id="8" name="Picture 7" descr="category.png">
             <a:hlinkClick r:id="rId2"/>
           </p:cNvPr>
           <p:cNvPicPr>
@@ -7864,8 +7629,8 @@
         </p:blipFill>
         <p:spPr>
           <a:xfrm>
-            <a:off x="457200" y="1325880"/>
-            <a:ext cx="9738360" cy="5951220"/>
+            <a:off x="457200" y="1143000"/>
+            <a:ext cx="9738360" cy="6086475"/>
           </a:xfrm>
           <a:prstGeom prst="rect">
             <a:avLst/>
@@ -7880,8 +7645,8 @@
         </p:nvSpPr>
         <p:spPr>
           <a:xfrm>
-            <a:off x="457200" y="1325880"/>
-            <a:ext cx="9738360" cy="5951220"/>
+            <a:off x="457200" y="1143000"/>
+            <a:ext cx="9738360" cy="6086475"/>
           </a:xfrm>
           <a:prstGeom prst="rect">
             <a:avLst/>
@@ -7923,8 +7688,8 @@
         </p:nvSpPr>
         <p:spPr>
           <a:xfrm>
-            <a:off x="1020318" y="5527780"/>
-            <a:ext cx="1475872" cy="307467"/>
+            <a:off x="3103245" y="2750962"/>
+            <a:ext cx="6637401" cy="558005"/>
           </a:xfrm>
           <a:prstGeom prst="rect">
             <a:avLst/>
@@ -7966,7 +7731,7 @@
         </p:nvSpPr>
         <p:spPr>
           <a:xfrm>
-            <a:off x="896874" y="5404336"/>
+            <a:off x="2979801" y="2627518"/>
             <a:ext cx="310896" cy="310896"/>
           </a:xfrm>
           <a:prstGeom prst="ellipse">
@@ -8012,13 +7777,56 @@
       </p:sp>
       <p:sp>
         <p:nvSpPr>
-          <p:cNvPr id="12" name="Oval 11"/>
+          <p:cNvPr id="12" name="Rectangle 11"/>
           <p:cNvSpPr/>
           <p:nvPr/>
         </p:nvSpPr>
         <p:spPr>
           <a:xfrm>
-            <a:off x="10497312" y="1801368"/>
+            <a:off x="912114" y="3075469"/>
+            <a:ext cx="1930527" cy="992829"/>
+          </a:xfrm>
+          <a:prstGeom prst="rect">
+            <a:avLst/>
+          </a:prstGeom>
+          <a:noFill/>
+          <a:ln w="25400">
+            <a:solidFill>
+              <a:srgbClr val="AE9142"/>
+            </a:solidFill>
+          </a:ln>
+        </p:spPr>
+        <p:style>
+          <a:lnRef idx="1">
+            <a:schemeClr val="accent1"/>
+          </a:lnRef>
+          <a:fillRef idx="3">
+            <a:schemeClr val="accent1"/>
+          </a:fillRef>
+          <a:effectRef idx="2">
+            <a:schemeClr val="accent1"/>
+          </a:effectRef>
+          <a:fontRef idx="minor">
+            <a:schemeClr val="lt1"/>
+          </a:fontRef>
+        </p:style>
+        <p:txBody>
+          <a:bodyPr rtlCol="0" anchor="ctr"/>
+          <a:lstStyle/>
+          <a:p>
+            <a:pPr algn="ctr"/>
+          </a:p>
+        </p:txBody>
+      </p:sp>
+      <p:sp>
+        <p:nvSpPr>
+          <p:cNvPr id="13" name="Oval 12"/>
+          <p:cNvSpPr/>
+          <p:nvPr/>
+        </p:nvSpPr>
+        <p:spPr>
+          <a:xfrm>
+            <a:off x="788670" y="2952025"/>
             <a:ext cx="310896" cy="310896"/>
           </a:xfrm>
           <a:prstGeom prst="ellipse">
@@ -8057,6 +7865,153 @@
                 </a:solidFill>
                 <a:latin typeface="Arial"/>
               </a:rPr>
+              <a:t>2</a:t>
+            </a:r>
+          </a:p>
+        </p:txBody>
+      </p:sp>
+      <p:sp>
+        <p:nvSpPr>
+          <p:cNvPr id="14" name="Rectangle 13"/>
+          <p:cNvSpPr/>
+          <p:nvPr/>
+        </p:nvSpPr>
+        <p:spPr>
+          <a:xfrm>
+            <a:off x="3103245" y="3955049"/>
+            <a:ext cx="1484185" cy="2518886"/>
+          </a:xfrm>
+          <a:prstGeom prst="rect">
+            <a:avLst/>
+          </a:prstGeom>
+          <a:noFill/>
+          <a:ln w="25400">
+            <a:solidFill>
+              <a:srgbClr val="AE9142"/>
+            </a:solidFill>
+          </a:ln>
+        </p:spPr>
+        <p:style>
+          <a:lnRef idx="1">
+            <a:schemeClr val="accent1"/>
+          </a:lnRef>
+          <a:fillRef idx="3">
+            <a:schemeClr val="accent1"/>
+          </a:fillRef>
+          <a:effectRef idx="2">
+            <a:schemeClr val="accent1"/>
+          </a:effectRef>
+          <a:fontRef idx="minor">
+            <a:schemeClr val="lt1"/>
+          </a:fontRef>
+        </p:style>
+        <p:txBody>
+          <a:bodyPr rtlCol="0" anchor="ctr"/>
+          <a:lstStyle/>
+          <a:p>
+            <a:pPr algn="ctr"/>
+          </a:p>
+        </p:txBody>
+      </p:sp>
+      <p:sp>
+        <p:nvSpPr>
+          <p:cNvPr id="15" name="Oval 14"/>
+          <p:cNvSpPr/>
+          <p:nvPr/>
+        </p:nvSpPr>
+        <p:spPr>
+          <a:xfrm>
+            <a:off x="2979801" y="3831605"/>
+            <a:ext cx="310896" cy="310896"/>
+          </a:xfrm>
+          <a:prstGeom prst="ellipse">
+            <a:avLst/>
+          </a:prstGeom>
+          <a:solidFill>
+            <a:srgbClr val="0C2340"/>
+          </a:solidFill>
+          <a:ln>
+            <a:noFill/>
+          </a:ln>
+        </p:spPr>
+        <p:style>
+          <a:lnRef idx="1">
+            <a:schemeClr val="accent1"/>
+          </a:lnRef>
+          <a:fillRef idx="3">
+            <a:schemeClr val="accent1"/>
+          </a:fillRef>
+          <a:effectRef idx="2">
+            <a:schemeClr val="accent1"/>
+          </a:effectRef>
+          <a:fontRef idx="minor">
+            <a:schemeClr val="lt1"/>
+          </a:fontRef>
+        </p:style>
+        <p:txBody>
+          <a:bodyPr rtlCol="0" anchor="ctr" lIns="0" rIns="0" tIns="0" bIns="0"/>
+          <a:lstStyle/>
+          <a:p>
+            <a:pPr algn="ctr"/>
+            <a:r>
+              <a:rPr sz="1300" b="1">
+                <a:solidFill>
+                  <a:srgbClr val="FFFFFF"/>
+                </a:solidFill>
+                <a:latin typeface="Arial"/>
+              </a:rPr>
+              <a:t>3</a:t>
+            </a:r>
+          </a:p>
+        </p:txBody>
+      </p:sp>
+      <p:sp>
+        <p:nvSpPr>
+          <p:cNvPr id="16" name="Oval 15"/>
+          <p:cNvSpPr/>
+          <p:nvPr/>
+        </p:nvSpPr>
+        <p:spPr>
+          <a:xfrm>
+            <a:off x="10497312" y="1527048"/>
+            <a:ext cx="310896" cy="310896"/>
+          </a:xfrm>
+          <a:prstGeom prst="ellipse">
+            <a:avLst/>
+          </a:prstGeom>
+          <a:solidFill>
+            <a:srgbClr val="0C2340"/>
+          </a:solidFill>
+          <a:ln>
+            <a:noFill/>
+          </a:ln>
+        </p:spPr>
+        <p:style>
+          <a:lnRef idx="1">
+            <a:schemeClr val="accent1"/>
+          </a:lnRef>
+          <a:fillRef idx="3">
+            <a:schemeClr val="accent1"/>
+          </a:fillRef>
+          <a:effectRef idx="2">
+            <a:schemeClr val="accent1"/>
+          </a:effectRef>
+          <a:fontRef idx="minor">
+            <a:schemeClr val="lt1"/>
+          </a:fontRef>
+        </p:style>
+        <p:txBody>
+          <a:bodyPr rtlCol="0" anchor="ctr" lIns="0" rIns="0" tIns="0" bIns="0"/>
+          <a:lstStyle/>
+          <a:p>
+            <a:pPr algn="ctr"/>
+            <a:r>
+              <a:rPr sz="1300" b="1">
+                <a:solidFill>
+                  <a:srgbClr val="FFFFFF"/>
+                </a:solidFill>
+                <a:latin typeface="Arial"/>
+              </a:rPr>
               <a:t>1</a:t>
             </a:r>
           </a:p>
@@ -8064,13 +8019,13 @@
       </p:sp>
       <p:sp>
         <p:nvSpPr>
-          <p:cNvPr id="13" name="TextBox 12"/>
+          <p:cNvPr id="17" name="TextBox 16"/>
           <p:cNvSpPr txBox="1"/>
           <p:nvPr/>
         </p:nvSpPr>
         <p:spPr>
           <a:xfrm>
-            <a:off x="10972800" y="1828800"/>
+            <a:off x="10972800" y="1554480"/>
             <a:ext cx="3200400" cy="502920"/>
           </a:xfrm>
           <a:prstGeom prst="rect">
@@ -8099,9 +8054,32 @@
                 </a:solidFill>
                 <a:latin typeface="Arial"/>
               </a:rPr>
-              <a:t>The arrow signals</a:t>
-            </a:r>
-          </a:p>
+              <a:t>Just “Faculty”</a:t>
+            </a:r>
+          </a:p>
+        </p:txBody>
+      </p:sp>
+      <p:sp>
+        <p:nvSpPr>
+          <p:cNvPr id="18" name="TextBox 17"/>
+          <p:cNvSpPr txBox="1"/>
+          <p:nvPr/>
+        </p:nvSpPr>
+        <p:spPr>
+          <a:xfrm>
+            <a:off x="10972800" y="2139696"/>
+            <a:ext cx="3154680" cy="914400"/>
+          </a:xfrm>
+          <a:prstGeom prst="rect">
+            <a:avLst/>
+          </a:prstGeom>
+          <a:noFill/>
+        </p:spPr>
+        <p:txBody>
+          <a:bodyPr wrap="square" lIns="0" rIns="0" tIns="0" bIns="0" anchor="t">
+            <a:spAutoFit/>
+          </a:bodyPr>
+          <a:lstStyle/>
           <a:p>
             <a:pPr>
               <a:lnSpc>
@@ -8112,38 +8090,15 @@
               </a:spcAft>
             </a:pPr>
             <a:r>
-              <a:rPr sz="1800" b="1">
-                <a:solidFill>
-                  <a:srgbClr val="0C2340"/>
-                </a:solidFill>
-                <a:latin typeface="Arial"/>
-              </a:rPr>
-              <a:t>an offsite destination</a:t>
-            </a:r>
-          </a:p>
-        </p:txBody>
-      </p:sp>
-      <p:sp>
-        <p:nvSpPr>
-          <p:cNvPr id="14" name="TextBox 13"/>
-          <p:cNvSpPr txBox="1"/>
-          <p:nvPr/>
-        </p:nvSpPr>
-        <p:spPr>
-          <a:xfrm>
-            <a:off x="10972800" y="2414016"/>
-            <a:ext cx="3154680" cy="914400"/>
-          </a:xfrm>
-          <a:prstGeom prst="rect">
-            <a:avLst/>
-          </a:prstGeom>
-          <a:noFill/>
-        </p:spPr>
-        <p:txBody>
-          <a:bodyPr wrap="square" lIns="0" rIns="0" tIns="0" bIns="0" anchor="t">
-            <a:spAutoFit/>
-          </a:bodyPr>
-          <a:lstStyle/>
+              <a:rPr sz="1400" b="0">
+                <a:solidFill>
+                  <a:srgbClr val="52616D"/>
+                </a:solidFill>
+                <a:latin typeface="Arial"/>
+              </a:rPr>
+              <a:t>No lede.</a:t>
+            </a:r>
+          </a:p>
           <a:p>
             <a:pPr>
               <a:lnSpc>
@@ -8160,9 +8115,84 @@
                 </a:solidFill>
                 <a:latin typeface="Arial"/>
               </a:rPr>
-              <a:t>Clicking the name opens</a:t>
-            </a:r>
-          </a:p>
+              <a:t>No repeated group heading.</a:t>
+            </a:r>
+          </a:p>
+        </p:txBody>
+      </p:sp>
+      <p:sp>
+        <p:nvSpPr>
+          <p:cNvPr id="19" name="Oval 18"/>
+          <p:cNvSpPr/>
+          <p:nvPr/>
+        </p:nvSpPr>
+        <p:spPr>
+          <a:xfrm>
+            <a:off x="10497312" y="3218688"/>
+            <a:ext cx="310896" cy="310896"/>
+          </a:xfrm>
+          <a:prstGeom prst="ellipse">
+            <a:avLst/>
+          </a:prstGeom>
+          <a:solidFill>
+            <a:srgbClr val="0C2340"/>
+          </a:solidFill>
+          <a:ln>
+            <a:noFill/>
+          </a:ln>
+        </p:spPr>
+        <p:style>
+          <a:lnRef idx="1">
+            <a:schemeClr val="accent1"/>
+          </a:lnRef>
+          <a:fillRef idx="3">
+            <a:schemeClr val="accent1"/>
+          </a:fillRef>
+          <a:effectRef idx="2">
+            <a:schemeClr val="accent1"/>
+          </a:effectRef>
+          <a:fontRef idx="minor">
+            <a:schemeClr val="lt1"/>
+          </a:fontRef>
+        </p:style>
+        <p:txBody>
+          <a:bodyPr rtlCol="0" anchor="ctr" lIns="0" rIns="0" tIns="0" bIns="0"/>
+          <a:lstStyle/>
+          <a:p>
+            <a:pPr algn="ctr"/>
+            <a:r>
+              <a:rPr sz="1300" b="1">
+                <a:solidFill>
+                  <a:srgbClr val="FFFFFF"/>
+                </a:solidFill>
+                <a:latin typeface="Arial"/>
+              </a:rPr>
+              <a:t>2</a:t>
+            </a:r>
+          </a:p>
+        </p:txBody>
+      </p:sp>
+      <p:sp>
+        <p:nvSpPr>
+          <p:cNvPr id="20" name="TextBox 19"/>
+          <p:cNvSpPr txBox="1"/>
+          <p:nvPr/>
+        </p:nvSpPr>
+        <p:spPr>
+          <a:xfrm>
+            <a:off x="10972800" y="3246120"/>
+            <a:ext cx="3200400" cy="502920"/>
+          </a:xfrm>
+          <a:prstGeom prst="rect">
+            <a:avLst/>
+          </a:prstGeom>
+          <a:noFill/>
+        </p:spPr>
+        <p:txBody>
+          <a:bodyPr wrap="square" lIns="0" rIns="0" tIns="0" bIns="0" anchor="t">
+            <a:spAutoFit/>
+          </a:bodyPr>
+          <a:lstStyle/>
           <a:p>
             <a:pPr>
               <a:lnSpc>
@@ -8173,27 +8203,27 @@
               </a:spcAft>
             </a:pPr>
             <a:r>
-              <a:rPr sz="1400" b="0">
-                <a:solidFill>
-                  <a:srgbClr val="52616D"/>
-                </a:solidFill>
-                <a:latin typeface="Arial"/>
-              </a:rPr>
-              <a:t>the school’s full profile.</a:t>
-            </a:r>
-          </a:p>
-        </p:txBody>
-      </p:sp>
-      <p:sp>
-        <p:nvSpPr>
-          <p:cNvPr id="15" name="TextBox 14"/>
+              <a:rPr sz="1800" b="1">
+                <a:solidFill>
+                  <a:srgbClr val="0C2340"/>
+                </a:solidFill>
+                <a:latin typeface="Arial"/>
+              </a:rPr>
+              <a:t>Reveal its subgroups</a:t>
+            </a:r>
+          </a:p>
+        </p:txBody>
+      </p:sp>
+      <p:sp>
+        <p:nvSpPr>
+          <p:cNvPr id="21" name="TextBox 20"/>
           <p:cNvSpPr txBox="1"/>
           <p:nvPr/>
         </p:nvSpPr>
         <p:spPr>
           <a:xfrm>
-            <a:off x="10972800" y="4663440"/>
-            <a:ext cx="3200400" cy="1280160"/>
+            <a:off x="10972800" y="3831335"/>
+            <a:ext cx="3154680" cy="914400"/>
           </a:xfrm>
           <a:prstGeom prst="rect">
             <a:avLst/>
@@ -8215,13 +8245,13 @@
               </a:spcAft>
             </a:pPr>
             <a:r>
-              <a:rPr sz="1800" b="1">
-                <a:solidFill>
-                  <a:srgbClr val="0C2340"/>
-                </a:solidFill>
-                <a:latin typeface="Arial"/>
-              </a:rPr>
-              <a:t>No intermediate</a:t>
+              <a:rPr sz="1400" b="0">
+                <a:solidFill>
+                  <a:srgbClr val="52616D"/>
+                </a:solidFill>
+                <a:latin typeface="Arial"/>
+              </a:rPr>
+              <a:t>Other categories</a:t>
             </a:r>
           </a:p>
           <a:p>
@@ -8234,13 +8264,168 @@
               </a:spcAft>
             </a:pPr>
             <a:r>
+              <a:rPr sz="1400" b="0">
+                <a:solidFill>
+                  <a:srgbClr val="52616D"/>
+                </a:solidFill>
+                <a:latin typeface="Arial"/>
+              </a:rPr>
+              <a:t>stay collapsed.</a:t>
+            </a:r>
+          </a:p>
+        </p:txBody>
+      </p:sp>
+      <p:sp>
+        <p:nvSpPr>
+          <p:cNvPr id="22" name="Oval 21"/>
+          <p:cNvSpPr/>
+          <p:nvPr/>
+        </p:nvSpPr>
+        <p:spPr>
+          <a:xfrm>
+            <a:off x="10497312" y="4956048"/>
+            <a:ext cx="310896" cy="310896"/>
+          </a:xfrm>
+          <a:prstGeom prst="ellipse">
+            <a:avLst/>
+          </a:prstGeom>
+          <a:solidFill>
+            <a:srgbClr val="0C2340"/>
+          </a:solidFill>
+          <a:ln>
+            <a:noFill/>
+          </a:ln>
+        </p:spPr>
+        <p:style>
+          <a:lnRef idx="1">
+            <a:schemeClr val="accent1"/>
+          </a:lnRef>
+          <a:fillRef idx="3">
+            <a:schemeClr val="accent1"/>
+          </a:fillRef>
+          <a:effectRef idx="2">
+            <a:schemeClr val="accent1"/>
+          </a:effectRef>
+          <a:fontRef idx="minor">
+            <a:schemeClr val="lt1"/>
+          </a:fontRef>
+        </p:style>
+        <p:txBody>
+          <a:bodyPr rtlCol="0" anchor="ctr" lIns="0" rIns="0" tIns="0" bIns="0"/>
+          <a:lstStyle/>
+          <a:p>
+            <a:pPr algn="ctr"/>
+            <a:r>
+              <a:rPr sz="1300" b="1">
+                <a:solidFill>
+                  <a:srgbClr val="FFFFFF"/>
+                </a:solidFill>
+                <a:latin typeface="Arial"/>
+              </a:rPr>
+              <a:t>3</a:t>
+            </a:r>
+          </a:p>
+        </p:txBody>
+      </p:sp>
+      <p:sp>
+        <p:nvSpPr>
+          <p:cNvPr id="23" name="TextBox 22"/>
+          <p:cNvSpPr txBox="1"/>
+          <p:nvPr/>
+        </p:nvSpPr>
+        <p:spPr>
+          <a:xfrm>
+            <a:off x="10972800" y="4983480"/>
+            <a:ext cx="3200400" cy="502920"/>
+          </a:xfrm>
+          <a:prstGeom prst="rect">
+            <a:avLst/>
+          </a:prstGeom>
+          <a:noFill/>
+        </p:spPr>
+        <p:txBody>
+          <a:bodyPr wrap="square" lIns="0" rIns="0" tIns="0" bIns="0" anchor="t">
+            <a:spAutoFit/>
+          </a:bodyPr>
+          <a:lstStyle/>
+          <a:p>
+            <a:pPr>
+              <a:lnSpc>
+                <a:spcPct val="115000"/>
+              </a:lnSpc>
+              <a:spcAft>
+                <a:spcPts val="0"/>
+              </a:spcAft>
+            </a:pPr>
+            <a:r>
               <a:rPr sz="1800" b="1">
                 <a:solidFill>
                   <a:srgbClr val="0C2340"/>
                 </a:solidFill>
                 <a:latin typeface="Arial"/>
               </a:rPr>
-              <a:t>institute bio page.</a:t>
+              <a:t>Show core affiliates</a:t>
+            </a:r>
+          </a:p>
+        </p:txBody>
+      </p:sp>
+      <p:sp>
+        <p:nvSpPr>
+          <p:cNvPr id="24" name="TextBox 23"/>
+          <p:cNvSpPr txBox="1"/>
+          <p:nvPr/>
+        </p:nvSpPr>
+        <p:spPr>
+          <a:xfrm>
+            <a:off x="10972800" y="5568696"/>
+            <a:ext cx="3154680" cy="914400"/>
+          </a:xfrm>
+          <a:prstGeom prst="rect">
+            <a:avLst/>
+          </a:prstGeom>
+          <a:noFill/>
+        </p:spPr>
+        <p:txBody>
+          <a:bodyPr wrap="square" lIns="0" rIns="0" tIns="0" bIns="0" anchor="t">
+            <a:spAutoFit/>
+          </a:bodyPr>
+          <a:lstStyle/>
+          <a:p>
+            <a:pPr>
+              <a:lnSpc>
+                <a:spcPct val="115000"/>
+              </a:lnSpc>
+              <a:spcAft>
+                <a:spcPts val="0"/>
+              </a:spcAft>
+            </a:pPr>
+            <a:r>
+              <a:rPr sz="1400" b="0">
+                <a:solidFill>
+                  <a:srgbClr val="52616D"/>
+                </a:solidFill>
+                <a:latin typeface="Arial"/>
+              </a:rPr>
+              <a:t>No separate “Core”</a:t>
+            </a:r>
+          </a:p>
+          <a:p>
+            <a:pPr>
+              <a:lnSpc>
+                <a:spcPct val="115000"/>
+              </a:lnSpc>
+              <a:spcAft>
+                <a:spcPts val="0"/>
+              </a:spcAft>
+            </a:pPr>
+            <a:r>
+              <a:rPr sz="1400" b="0">
+                <a:solidFill>
+                  <a:srgbClr val="52616D"/>
+                </a:solidFill>
+                <a:latin typeface="Arial"/>
+              </a:rPr>
+              <a:t>page or heading needed.</a:t>
             </a:r>
           </a:p>
         </p:txBody>
@@ -8385,7 +8570,7 @@
                 </a:solidFill>
                 <a:latin typeface="Arial"/>
               </a:rPr>
-              <a:t>A full biography lives on the institute site</a:t>
+              <a:t>A school-hosted profile opens directly</a:t>
             </a:r>
           </a:p>
         </p:txBody>
@@ -8427,7 +8612,7 @@
                 </a:solidFill>
                 <a:latin typeface="Arial"/>
               </a:rPr>
-              <a:t>DRAFT FOR FEEDBACK  ·  Profile destination 2</a:t>
+              <a:t>DRAFT FOR FEEDBACK  ·  Profile destination 1</a:t>
             </a:r>
           </a:p>
         </p:txBody>
@@ -8512,14 +8697,14 @@
                 </a:solidFill>
                 <a:latin typeface="Arial"/>
               </a:rPr>
-              <a:t>5 / 7</a:t>
+              <a:t>5 / 8</a:t>
             </a:r>
           </a:p>
         </p:txBody>
       </p:sp>
       <p:pic>
         <p:nvPicPr>
-          <p:cNvPr id="8" name="Picture 7" descr="full.png">
+          <p:cNvPr id="8" name="Picture 7" descr="external.png">
             <a:hlinkClick r:id="rId2"/>
           </p:cNvPr>
           <p:cNvPicPr>
@@ -8535,8 +8720,8 @@
         </p:blipFill>
         <p:spPr>
           <a:xfrm>
-            <a:off x="457200" y="1234440"/>
-            <a:ext cx="7772400" cy="6514011"/>
+            <a:off x="457200" y="1325880"/>
+            <a:ext cx="9738360" cy="5951220"/>
           </a:xfrm>
           <a:prstGeom prst="rect">
             <a:avLst/>
@@ -8551,8 +8736,8 @@
         </p:nvSpPr>
         <p:spPr>
           <a:xfrm>
-            <a:off x="457200" y="1234440"/>
-            <a:ext cx="7772400" cy="6514011"/>
+            <a:off x="457200" y="1325880"/>
+            <a:ext cx="9738360" cy="5951220"/>
           </a:xfrm>
           <a:prstGeom prst="rect">
             <a:avLst/>
@@ -8594,8 +8779,8 @@
         </p:nvSpPr>
         <p:spPr>
           <a:xfrm>
-            <a:off x="617655" y="1300863"/>
-            <a:ext cx="7259029" cy="1248373"/>
+            <a:off x="1020318" y="5527780"/>
+            <a:ext cx="1475872" cy="307467"/>
           </a:xfrm>
           <a:prstGeom prst="rect">
             <a:avLst/>
@@ -8637,7 +8822,7 @@
         </p:nvSpPr>
         <p:spPr>
           <a:xfrm>
-            <a:off x="494211" y="1177419"/>
+            <a:off x="896874" y="5404336"/>
             <a:ext cx="310896" cy="310896"/>
           </a:xfrm>
           <a:prstGeom prst="ellipse">
@@ -8683,56 +8868,13 @@
       </p:sp>
       <p:sp>
         <p:nvSpPr>
-          <p:cNvPr id="12" name="Rectangle 11"/>
+          <p:cNvPr id="12" name="Oval 11"/>
           <p:cNvSpPr/>
           <p:nvPr/>
         </p:nvSpPr>
         <p:spPr>
           <a:xfrm>
-            <a:off x="617655" y="3088515"/>
-            <a:ext cx="4752199" cy="2654807"/>
-          </a:xfrm>
-          <a:prstGeom prst="rect">
-            <a:avLst/>
-          </a:prstGeom>
-          <a:noFill/>
-          <a:ln w="25400">
-            <a:solidFill>
-              <a:srgbClr val="AE9142"/>
-            </a:solidFill>
-          </a:ln>
-        </p:spPr>
-        <p:style>
-          <a:lnRef idx="1">
-            <a:schemeClr val="accent1"/>
-          </a:lnRef>
-          <a:fillRef idx="3">
-            <a:schemeClr val="accent1"/>
-          </a:fillRef>
-          <a:effectRef idx="2">
-            <a:schemeClr val="accent1"/>
-          </a:effectRef>
-          <a:fontRef idx="minor">
-            <a:schemeClr val="lt1"/>
-          </a:fontRef>
-        </p:style>
-        <p:txBody>
-          <a:bodyPr rtlCol="0" anchor="ctr"/>
-          <a:lstStyle/>
-          <a:p>
-            <a:pPr algn="ctr"/>
-          </a:p>
-        </p:txBody>
-      </p:sp>
-      <p:sp>
-        <p:nvSpPr>
-          <p:cNvPr id="13" name="Oval 12"/>
-          <p:cNvSpPr/>
-          <p:nvPr/>
-        </p:nvSpPr>
-        <p:spPr>
-          <a:xfrm>
-            <a:off x="494211" y="2965071"/>
+            <a:off x="10497312" y="1801368"/>
             <a:ext cx="310896" cy="310896"/>
           </a:xfrm>
           <a:prstGeom prst="ellipse">
@@ -8771,153 +8913,6 @@
                 </a:solidFill>
                 <a:latin typeface="Arial"/>
               </a:rPr>
-              <a:t>2</a:t>
-            </a:r>
-          </a:p>
-        </p:txBody>
-      </p:sp>
-      <p:sp>
-        <p:nvSpPr>
-          <p:cNvPr id="14" name="Rectangle 13"/>
-          <p:cNvSpPr/>
-          <p:nvPr/>
-        </p:nvSpPr>
-        <p:spPr>
-          <a:xfrm>
-            <a:off x="5631547" y="3088515"/>
-            <a:ext cx="2245137" cy="3913196"/>
-          </a:xfrm>
-          <a:prstGeom prst="rect">
-            <a:avLst/>
-          </a:prstGeom>
-          <a:noFill/>
-          <a:ln w="25400">
-            <a:solidFill>
-              <a:srgbClr val="AE9142"/>
-            </a:solidFill>
-          </a:ln>
-        </p:spPr>
-        <p:style>
-          <a:lnRef idx="1">
-            <a:schemeClr val="accent1"/>
-          </a:lnRef>
-          <a:fillRef idx="3">
-            <a:schemeClr val="accent1"/>
-          </a:fillRef>
-          <a:effectRef idx="2">
-            <a:schemeClr val="accent1"/>
-          </a:effectRef>
-          <a:fontRef idx="minor">
-            <a:schemeClr val="lt1"/>
-          </a:fontRef>
-        </p:style>
-        <p:txBody>
-          <a:bodyPr rtlCol="0" anchor="ctr"/>
-          <a:lstStyle/>
-          <a:p>
-            <a:pPr algn="ctr"/>
-          </a:p>
-        </p:txBody>
-      </p:sp>
-      <p:sp>
-        <p:nvSpPr>
-          <p:cNvPr id="15" name="Oval 14"/>
-          <p:cNvSpPr/>
-          <p:nvPr/>
-        </p:nvSpPr>
-        <p:spPr>
-          <a:xfrm>
-            <a:off x="5508103" y="2965071"/>
-            <a:ext cx="310896" cy="310896"/>
-          </a:xfrm>
-          <a:prstGeom prst="ellipse">
-            <a:avLst/>
-          </a:prstGeom>
-          <a:solidFill>
-            <a:srgbClr val="0C2340"/>
-          </a:solidFill>
-          <a:ln>
-            <a:noFill/>
-          </a:ln>
-        </p:spPr>
-        <p:style>
-          <a:lnRef idx="1">
-            <a:schemeClr val="accent1"/>
-          </a:lnRef>
-          <a:fillRef idx="3">
-            <a:schemeClr val="accent1"/>
-          </a:fillRef>
-          <a:effectRef idx="2">
-            <a:schemeClr val="accent1"/>
-          </a:effectRef>
-          <a:fontRef idx="minor">
-            <a:schemeClr val="lt1"/>
-          </a:fontRef>
-        </p:style>
-        <p:txBody>
-          <a:bodyPr rtlCol="0" anchor="ctr" lIns="0" rIns="0" tIns="0" bIns="0"/>
-          <a:lstStyle/>
-          <a:p>
-            <a:pPr algn="ctr"/>
-            <a:r>
-              <a:rPr sz="1300" b="1">
-                <a:solidFill>
-                  <a:srgbClr val="FFFFFF"/>
-                </a:solidFill>
-                <a:latin typeface="Arial"/>
-              </a:rPr>
-              <a:t>3</a:t>
-            </a:r>
-          </a:p>
-        </p:txBody>
-      </p:sp>
-      <p:sp>
-        <p:nvSpPr>
-          <p:cNvPr id="16" name="Oval 15"/>
-          <p:cNvSpPr/>
-          <p:nvPr/>
-        </p:nvSpPr>
-        <p:spPr>
-          <a:xfrm>
-            <a:off x="10497312" y="1527048"/>
-            <a:ext cx="310896" cy="310896"/>
-          </a:xfrm>
-          <a:prstGeom prst="ellipse">
-            <a:avLst/>
-          </a:prstGeom>
-          <a:solidFill>
-            <a:srgbClr val="0C2340"/>
-          </a:solidFill>
-          <a:ln>
-            <a:noFill/>
-          </a:ln>
-        </p:spPr>
-        <p:style>
-          <a:lnRef idx="1">
-            <a:schemeClr val="accent1"/>
-          </a:lnRef>
-          <a:fillRef idx="3">
-            <a:schemeClr val="accent1"/>
-          </a:fillRef>
-          <a:effectRef idx="2">
-            <a:schemeClr val="accent1"/>
-          </a:effectRef>
-          <a:fontRef idx="minor">
-            <a:schemeClr val="lt1"/>
-          </a:fontRef>
-        </p:style>
-        <p:txBody>
-          <a:bodyPr rtlCol="0" anchor="ctr" lIns="0" rIns="0" tIns="0" bIns="0"/>
-          <a:lstStyle/>
-          <a:p>
-            <a:pPr algn="ctr"/>
-            <a:r>
-              <a:rPr sz="1300" b="1">
-                <a:solidFill>
-                  <a:srgbClr val="FFFFFF"/>
-                </a:solidFill>
-                <a:latin typeface="Arial"/>
-              </a:rPr>
               <a:t>1</a:t>
             </a:r>
           </a:p>
@@ -8925,13 +8920,13 @@
       </p:sp>
       <p:sp>
         <p:nvSpPr>
-          <p:cNvPr id="17" name="TextBox 16"/>
+          <p:cNvPr id="13" name="TextBox 12"/>
           <p:cNvSpPr txBox="1"/>
           <p:nvPr/>
         </p:nvSpPr>
         <p:spPr>
           <a:xfrm>
-            <a:off x="10972800" y="1554480"/>
+            <a:off x="10972800" y="1828800"/>
             <a:ext cx="3200400" cy="502920"/>
           </a:xfrm>
           <a:prstGeom prst="rect">
@@ -8960,84 +8955,9 @@
                 </a:solidFill>
                 <a:latin typeface="Arial"/>
               </a:rPr>
-              <a:t>Name + role</a:t>
-            </a:r>
-          </a:p>
-        </p:txBody>
-      </p:sp>
-      <p:sp>
-        <p:nvSpPr>
-          <p:cNvPr id="18" name="Oval 17"/>
-          <p:cNvSpPr/>
-          <p:nvPr/>
-        </p:nvSpPr>
-        <p:spPr>
-          <a:xfrm>
-            <a:off x="10497312" y="2944368"/>
-            <a:ext cx="310896" cy="310896"/>
-          </a:xfrm>
-          <a:prstGeom prst="ellipse">
-            <a:avLst/>
-          </a:prstGeom>
-          <a:solidFill>
-            <a:srgbClr val="0C2340"/>
-          </a:solidFill>
-          <a:ln>
-            <a:noFill/>
-          </a:ln>
-        </p:spPr>
-        <p:style>
-          <a:lnRef idx="1">
-            <a:schemeClr val="accent1"/>
-          </a:lnRef>
-          <a:fillRef idx="3">
-            <a:schemeClr val="accent1"/>
-          </a:fillRef>
-          <a:effectRef idx="2">
-            <a:schemeClr val="accent1"/>
-          </a:effectRef>
-          <a:fontRef idx="minor">
-            <a:schemeClr val="lt1"/>
-          </a:fontRef>
-        </p:style>
-        <p:txBody>
-          <a:bodyPr rtlCol="0" anchor="ctr" lIns="0" rIns="0" tIns="0" bIns="0"/>
-          <a:lstStyle/>
-          <a:p>
-            <a:pPr algn="ctr"/>
-            <a:r>
-              <a:rPr sz="1300" b="1">
-                <a:solidFill>
-                  <a:srgbClr val="FFFFFF"/>
-                </a:solidFill>
-                <a:latin typeface="Arial"/>
-              </a:rPr>
-              <a:t>2</a:t>
-            </a:r>
-          </a:p>
-        </p:txBody>
-      </p:sp>
-      <p:sp>
-        <p:nvSpPr>
-          <p:cNvPr id="19" name="TextBox 18"/>
-          <p:cNvSpPr txBox="1"/>
-          <p:nvPr/>
-        </p:nvSpPr>
-        <p:spPr>
-          <a:xfrm>
-            <a:off x="10972800" y="2971800"/>
-            <a:ext cx="3200400" cy="502920"/>
-          </a:xfrm>
-          <a:prstGeom prst="rect">
-            <a:avLst/>
-          </a:prstGeom>
-          <a:noFill/>
-        </p:spPr>
-        <p:txBody>
-          <a:bodyPr wrap="square" lIns="0" rIns="0" tIns="0" bIns="0" anchor="t">
-            <a:spAutoFit/>
-          </a:bodyPr>
-          <a:lstStyle/>
+              <a:t>The arrow signals</a:t>
+            </a:r>
+          </a:p>
           <a:p>
             <a:pPr>
               <a:lnSpc>
@@ -9054,20 +8974,20 @@
                 </a:solidFill>
                 <a:latin typeface="Arial"/>
               </a:rPr>
-              <a:t>Full biography</a:t>
-            </a:r>
-          </a:p>
-        </p:txBody>
-      </p:sp>
-      <p:sp>
-        <p:nvSpPr>
-          <p:cNvPr id="20" name="TextBox 19"/>
+              <a:t>an offsite destination</a:t>
+            </a:r>
+          </a:p>
+        </p:txBody>
+      </p:sp>
+      <p:sp>
+        <p:nvSpPr>
+          <p:cNvPr id="14" name="TextBox 13"/>
           <p:cNvSpPr txBox="1"/>
           <p:nvPr/>
         </p:nvSpPr>
         <p:spPr>
           <a:xfrm>
-            <a:off x="10972800" y="3557016"/>
+            <a:off x="10972800" y="2414016"/>
             <a:ext cx="3154680" cy="914400"/>
           </a:xfrm>
           <a:prstGeom prst="rect">
@@ -9096,84 +9016,9 @@
                 </a:solidFill>
                 <a:latin typeface="Arial"/>
               </a:rPr>
-              <a:t>Maintained by the institute.</a:t>
-            </a:r>
-          </a:p>
-        </p:txBody>
-      </p:sp>
-      <p:sp>
-        <p:nvSpPr>
-          <p:cNvPr id="21" name="Oval 20"/>
-          <p:cNvSpPr/>
-          <p:nvPr/>
-        </p:nvSpPr>
-        <p:spPr>
-          <a:xfrm>
-            <a:off x="10497312" y="4681728"/>
-            <a:ext cx="310896" cy="310896"/>
-          </a:xfrm>
-          <a:prstGeom prst="ellipse">
-            <a:avLst/>
-          </a:prstGeom>
-          <a:solidFill>
-            <a:srgbClr val="0C2340"/>
-          </a:solidFill>
-          <a:ln>
-            <a:noFill/>
-          </a:ln>
-        </p:spPr>
-        <p:style>
-          <a:lnRef idx="1">
-            <a:schemeClr val="accent1"/>
-          </a:lnRef>
-          <a:fillRef idx="3">
-            <a:schemeClr val="accent1"/>
-          </a:fillRef>
-          <a:effectRef idx="2">
-            <a:schemeClr val="accent1"/>
-          </a:effectRef>
-          <a:fontRef idx="minor">
-            <a:schemeClr val="lt1"/>
-          </a:fontRef>
-        </p:style>
-        <p:txBody>
-          <a:bodyPr rtlCol="0" anchor="ctr" lIns="0" rIns="0" tIns="0" bIns="0"/>
-          <a:lstStyle/>
-          <a:p>
-            <a:pPr algn="ctr"/>
-            <a:r>
-              <a:rPr sz="1300" b="1">
-                <a:solidFill>
-                  <a:srgbClr val="FFFFFF"/>
-                </a:solidFill>
-                <a:latin typeface="Arial"/>
-              </a:rPr>
-              <a:t>3</a:t>
-            </a:r>
-          </a:p>
-        </p:txBody>
-      </p:sp>
-      <p:sp>
-        <p:nvSpPr>
-          <p:cNvPr id="22" name="TextBox 21"/>
-          <p:cNvSpPr txBox="1"/>
-          <p:nvPr/>
-        </p:nvSpPr>
-        <p:spPr>
-          <a:xfrm>
-            <a:off x="10972800" y="4709160"/>
-            <a:ext cx="3200400" cy="502920"/>
-          </a:xfrm>
-          <a:prstGeom prst="rect">
-            <a:avLst/>
-          </a:prstGeom>
-          <a:noFill/>
-        </p:spPr>
-        <p:txBody>
-          <a:bodyPr wrap="square" lIns="0" rIns="0" tIns="0" bIns="0" anchor="t">
-            <a:spAutoFit/>
-          </a:bodyPr>
-          <a:lstStyle/>
+              <a:t>Clicking the name opens</a:t>
+            </a:r>
+          </a:p>
           <a:p>
             <a:pPr>
               <a:lnSpc>
@@ -9184,27 +9029,27 @@
               </a:spcAft>
             </a:pPr>
             <a:r>
-              <a:rPr sz="1800" b="1">
-                <a:solidFill>
-                  <a:srgbClr val="0C2340"/>
-                </a:solidFill>
-                <a:latin typeface="Arial"/>
-              </a:rPr>
-              <a:t>Photo + contact details</a:t>
-            </a:r>
-          </a:p>
-        </p:txBody>
-      </p:sp>
-      <p:sp>
-        <p:nvSpPr>
-          <p:cNvPr id="23" name="TextBox 22"/>
+              <a:rPr sz="1400" b="0">
+                <a:solidFill>
+                  <a:srgbClr val="52616D"/>
+                </a:solidFill>
+                <a:latin typeface="Arial"/>
+              </a:rPr>
+              <a:t>the school’s full profile.</a:t>
+            </a:r>
+          </a:p>
+        </p:txBody>
+      </p:sp>
+      <p:sp>
+        <p:nvSpPr>
+          <p:cNvPr id="15" name="TextBox 14"/>
           <p:cNvSpPr txBox="1"/>
           <p:nvPr/>
         </p:nvSpPr>
         <p:spPr>
           <a:xfrm>
-            <a:off x="10972800" y="5294376"/>
-            <a:ext cx="3154680" cy="914400"/>
+            <a:off x="10972800" y="4663440"/>
+            <a:ext cx="3200400" cy="1280160"/>
           </a:xfrm>
           <a:prstGeom prst="rect">
             <a:avLst/>
@@ -9226,13 +9071,13 @@
               </a:spcAft>
             </a:pPr>
             <a:r>
-              <a:rPr sz="1400" b="0">
-                <a:solidFill>
-                  <a:srgbClr val="52616D"/>
-                </a:solidFill>
-                <a:latin typeface="Arial"/>
-              </a:rPr>
-              <a:t>Keep office and email</a:t>
+              <a:rPr sz="1800" b="1">
+                <a:solidFill>
+                  <a:srgbClr val="0C2340"/>
+                </a:solidFill>
+                <a:latin typeface="Arial"/>
+              </a:rPr>
+              <a:t>No intermediate</a:t>
             </a:r>
           </a:p>
           <a:p>
@@ -9245,13 +9090,13 @@
               </a:spcAft>
             </a:pPr>
             <a:r>
-              <a:rPr sz="1400" b="0">
-                <a:solidFill>
-                  <a:srgbClr val="52616D"/>
-                </a:solidFill>
-                <a:latin typeface="Arial"/>
-              </a:rPr>
-              <a:t>with the portrait.</a:t>
+              <a:rPr sz="1800" b="1">
+                <a:solidFill>
+                  <a:srgbClr val="0C2340"/>
+                </a:solidFill>
+                <a:latin typeface="Arial"/>
+              </a:rPr>
+              <a:t>institute bio page.</a:t>
             </a:r>
           </a:p>
         </p:txBody>
@@ -9396,7 +9241,7 @@
                 </a:solidFill>
                 <a:latin typeface="Arial"/>
               </a:rPr>
-              <a:t>An abridged biography adds institute context</a:t>
+              <a:t>A full biography lives on the institute site</a:t>
             </a:r>
           </a:p>
         </p:txBody>
@@ -9438,7 +9283,7 @@
                 </a:solidFill>
                 <a:latin typeface="Arial"/>
               </a:rPr>
-              <a:t>DRAFT FOR FEEDBACK  ·  Profile destination 3</a:t>
+              <a:t>DRAFT FOR FEEDBACK  ·  Profile destination 2</a:t>
             </a:r>
           </a:p>
         </p:txBody>
@@ -9523,14 +9368,14 @@
                 </a:solidFill>
                 <a:latin typeface="Arial"/>
               </a:rPr>
-              <a:t>6 / 7</a:t>
+              <a:t>6 / 8</a:t>
             </a:r>
           </a:p>
         </p:txBody>
       </p:sp>
       <p:pic>
         <p:nvPicPr>
-          <p:cNvPr id="8" name="Picture 7" descr="abridged.png">
+          <p:cNvPr id="8" name="Picture 7" descr="full.png">
             <a:hlinkClick r:id="rId2"/>
           </p:cNvPr>
           <p:cNvPicPr>
@@ -9546,8 +9391,8 @@
         </p:blipFill>
         <p:spPr>
           <a:xfrm>
-            <a:off x="457200" y="1325880"/>
-            <a:ext cx="9372600" cy="6516188"/>
+            <a:off x="457200" y="1234440"/>
+            <a:ext cx="7772400" cy="6514011"/>
           </a:xfrm>
           <a:prstGeom prst="rect">
             <a:avLst/>
@@ -9562,8 +9407,8 @@
         </p:nvSpPr>
         <p:spPr>
           <a:xfrm>
-            <a:off x="457200" y="1325880"/>
-            <a:ext cx="9372600" cy="6516188"/>
+            <a:off x="457200" y="1234440"/>
+            <a:ext cx="7772400" cy="6514011"/>
           </a:xfrm>
           <a:prstGeom prst="rect">
             <a:avLst/>
@@ -9605,8 +9450,8 @@
         </p:nvSpPr>
         <p:spPr>
           <a:xfrm>
-            <a:off x="657279" y="3568265"/>
-            <a:ext cx="5717415" cy="2250948"/>
+            <a:off x="617655" y="1300863"/>
+            <a:ext cx="7259029" cy="1248373"/>
           </a:xfrm>
           <a:prstGeom prst="rect">
             <a:avLst/>
@@ -9648,7 +9493,7 @@
         </p:nvSpPr>
         <p:spPr>
           <a:xfrm>
-            <a:off x="533835" y="3444821"/>
+            <a:off x="494211" y="1177419"/>
             <a:ext cx="310896" cy="310896"/>
           </a:xfrm>
           <a:prstGeom prst="ellipse">
@@ -9700,8 +9545,8 @@
         </p:nvSpPr>
         <p:spPr>
           <a:xfrm>
-            <a:off x="6703443" y="3568265"/>
-            <a:ext cx="2694193" cy="4305806"/>
+            <a:off x="617655" y="3088515"/>
+            <a:ext cx="4752199" cy="2654807"/>
           </a:xfrm>
           <a:prstGeom prst="rect">
             <a:avLst/>
@@ -9743,7 +9588,7 @@
         </p:nvSpPr>
         <p:spPr>
           <a:xfrm>
-            <a:off x="6579999" y="3444821"/>
+            <a:off x="494211" y="2965071"/>
             <a:ext cx="310896" cy="310896"/>
           </a:xfrm>
           <a:prstGeom prst="ellipse">
@@ -9795,8 +9640,8 @@
         </p:nvSpPr>
         <p:spPr>
           <a:xfrm>
-            <a:off x="657279" y="5817689"/>
-            <a:ext cx="2161545" cy="506556"/>
+            <a:off x="5631547" y="3088515"/>
+            <a:ext cx="2245137" cy="3913196"/>
           </a:xfrm>
           <a:prstGeom prst="rect">
             <a:avLst/>
@@ -9838,7 +9683,7 @@
         </p:nvSpPr>
         <p:spPr>
           <a:xfrm>
-            <a:off x="533835" y="5694245"/>
+            <a:off x="5508103" y="2965071"/>
             <a:ext cx="310896" cy="310896"/>
           </a:xfrm>
           <a:prstGeom prst="ellipse">
@@ -9890,7 +9735,7 @@
         </p:nvSpPr>
         <p:spPr>
           <a:xfrm>
-            <a:off x="10497312" y="1572768"/>
+            <a:off x="10497312" y="1527048"/>
             <a:ext cx="310896" cy="310896"/>
           </a:xfrm>
           <a:prstGeom prst="ellipse">
@@ -9942,7 +9787,7 @@
         </p:nvSpPr>
         <p:spPr>
           <a:xfrm>
-            <a:off x="10972800" y="1600200"/>
+            <a:off x="10972800" y="1554480"/>
             <a:ext cx="3200400" cy="502920"/>
           </a:xfrm>
           <a:prstGeom prst="rect">
@@ -9971,9 +9816,84 @@
                 </a:solidFill>
                 <a:latin typeface="Arial"/>
               </a:rPr>
-              <a:t>Short, institute-specific</a:t>
-            </a:r>
-          </a:p>
+              <a:t>Name + role</a:t>
+            </a:r>
+          </a:p>
+        </p:txBody>
+      </p:sp>
+      <p:sp>
+        <p:nvSpPr>
+          <p:cNvPr id="18" name="Oval 17"/>
+          <p:cNvSpPr/>
+          <p:nvPr/>
+        </p:nvSpPr>
+        <p:spPr>
+          <a:xfrm>
+            <a:off x="10497312" y="2944368"/>
+            <a:ext cx="310896" cy="310896"/>
+          </a:xfrm>
+          <a:prstGeom prst="ellipse">
+            <a:avLst/>
+          </a:prstGeom>
+          <a:solidFill>
+            <a:srgbClr val="0C2340"/>
+          </a:solidFill>
+          <a:ln>
+            <a:noFill/>
+          </a:ln>
+        </p:spPr>
+        <p:style>
+          <a:lnRef idx="1">
+            <a:schemeClr val="accent1"/>
+          </a:lnRef>
+          <a:fillRef idx="3">
+            <a:schemeClr val="accent1"/>
+          </a:fillRef>
+          <a:effectRef idx="2">
+            <a:schemeClr val="accent1"/>
+          </a:effectRef>
+          <a:fontRef idx="minor">
+            <a:schemeClr val="lt1"/>
+          </a:fontRef>
+        </p:style>
+        <p:txBody>
+          <a:bodyPr rtlCol="0" anchor="ctr" lIns="0" rIns="0" tIns="0" bIns="0"/>
+          <a:lstStyle/>
+          <a:p>
+            <a:pPr algn="ctr"/>
+            <a:r>
+              <a:rPr sz="1300" b="1">
+                <a:solidFill>
+                  <a:srgbClr val="FFFFFF"/>
+                </a:solidFill>
+                <a:latin typeface="Arial"/>
+              </a:rPr>
+              <a:t>2</a:t>
+            </a:r>
+          </a:p>
+        </p:txBody>
+      </p:sp>
+      <p:sp>
+        <p:nvSpPr>
+          <p:cNvPr id="19" name="TextBox 18"/>
+          <p:cNvSpPr txBox="1"/>
+          <p:nvPr/>
+        </p:nvSpPr>
+        <p:spPr>
+          <a:xfrm>
+            <a:off x="10972800" y="2971800"/>
+            <a:ext cx="3200400" cy="502920"/>
+          </a:xfrm>
+          <a:prstGeom prst="rect">
+            <a:avLst/>
+          </a:prstGeom>
+          <a:noFill/>
+        </p:spPr>
+        <p:txBody>
+          <a:bodyPr wrap="square" lIns="0" rIns="0" tIns="0" bIns="0" anchor="t">
+            <a:spAutoFit/>
+          </a:bodyPr>
+          <a:lstStyle/>
           <a:p>
             <a:pPr>
               <a:lnSpc>
@@ -9990,73 +9910,21 @@
                 </a:solidFill>
                 <a:latin typeface="Arial"/>
               </a:rPr>
-              <a:t>biography</a:t>
-            </a:r>
-          </a:p>
-        </p:txBody>
-      </p:sp>
-      <p:sp>
-        <p:nvSpPr>
-          <p:cNvPr id="18" name="Oval 17"/>
-          <p:cNvSpPr/>
-          <p:nvPr/>
-        </p:nvSpPr>
-        <p:spPr>
-          <a:xfrm>
-            <a:off x="10497312" y="3264408"/>
-            <a:ext cx="310896" cy="310896"/>
-          </a:xfrm>
-          <a:prstGeom prst="ellipse">
-            <a:avLst/>
-          </a:prstGeom>
-          <a:solidFill>
-            <a:srgbClr val="0C2340"/>
-          </a:solidFill>
-          <a:ln>
-            <a:noFill/>
-          </a:ln>
-        </p:spPr>
-        <p:style>
-          <a:lnRef idx="1">
-            <a:schemeClr val="accent1"/>
-          </a:lnRef>
-          <a:fillRef idx="3">
-            <a:schemeClr val="accent1"/>
-          </a:fillRef>
-          <a:effectRef idx="2">
-            <a:schemeClr val="accent1"/>
-          </a:effectRef>
-          <a:fontRef idx="minor">
-            <a:schemeClr val="lt1"/>
-          </a:fontRef>
-        </p:style>
-        <p:txBody>
-          <a:bodyPr rtlCol="0" anchor="ctr" lIns="0" rIns="0" tIns="0" bIns="0"/>
-          <a:lstStyle/>
-          <a:p>
-            <a:pPr algn="ctr"/>
-            <a:r>
-              <a:rPr sz="1300" b="1">
-                <a:solidFill>
-                  <a:srgbClr val="FFFFFF"/>
-                </a:solidFill>
-                <a:latin typeface="Arial"/>
-              </a:rPr>
-              <a:t>2</a:t>
-            </a:r>
-          </a:p>
-        </p:txBody>
-      </p:sp>
-      <p:sp>
-        <p:nvSpPr>
-          <p:cNvPr id="19" name="TextBox 18"/>
+              <a:t>Full biography</a:t>
+            </a:r>
+          </a:p>
+        </p:txBody>
+      </p:sp>
+      <p:sp>
+        <p:nvSpPr>
+          <p:cNvPr id="20" name="TextBox 19"/>
           <p:cNvSpPr txBox="1"/>
           <p:nvPr/>
         </p:nvSpPr>
         <p:spPr>
           <a:xfrm>
-            <a:off x="10972800" y="3291840"/>
-            <a:ext cx="3200400" cy="502920"/>
+            <a:off x="10972800" y="3557016"/>
+            <a:ext cx="3154680" cy="914400"/>
           </a:xfrm>
           <a:prstGeom prst="rect">
             <a:avLst/>
@@ -10078,26 +9946,26 @@
               </a:spcAft>
             </a:pPr>
             <a:r>
-              <a:rPr sz="1800" b="1">
-                <a:solidFill>
-                  <a:srgbClr val="0C2340"/>
-                </a:solidFill>
-                <a:latin typeface="Arial"/>
-              </a:rPr>
-              <a:t>Photo + office + email</a:t>
-            </a:r>
-          </a:p>
-        </p:txBody>
-      </p:sp>
-      <p:sp>
-        <p:nvSpPr>
-          <p:cNvPr id="20" name="Oval 19"/>
+              <a:rPr sz="1400" b="0">
+                <a:solidFill>
+                  <a:srgbClr val="52616D"/>
+                </a:solidFill>
+                <a:latin typeface="Arial"/>
+              </a:rPr>
+              <a:t>Maintained by the institute.</a:t>
+            </a:r>
+          </a:p>
+        </p:txBody>
+      </p:sp>
+      <p:sp>
+        <p:nvSpPr>
+          <p:cNvPr id="21" name="Oval 20"/>
           <p:cNvSpPr/>
           <p:nvPr/>
         </p:nvSpPr>
         <p:spPr>
           <a:xfrm>
-            <a:off x="10497312" y="4727448"/>
+            <a:off x="10497312" y="4681728"/>
             <a:ext cx="310896" cy="310896"/>
           </a:xfrm>
           <a:prstGeom prst="ellipse">
@@ -10143,13 +10011,13 @@
       </p:sp>
       <p:sp>
         <p:nvSpPr>
-          <p:cNvPr id="21" name="TextBox 20"/>
+          <p:cNvPr id="22" name="TextBox 21"/>
           <p:cNvSpPr txBox="1"/>
           <p:nvPr/>
         </p:nvSpPr>
         <p:spPr>
           <a:xfrm>
-            <a:off x="10972800" y="4754880"/>
+            <a:off x="10972800" y="4709160"/>
             <a:ext cx="3200400" cy="502920"/>
           </a:xfrm>
           <a:prstGeom prst="rect">
@@ -10178,20 +10046,20 @@
                 </a:solidFill>
                 <a:latin typeface="Arial"/>
               </a:rPr>
-              <a:t>Button to the full bio</a:t>
-            </a:r>
-          </a:p>
-        </p:txBody>
-      </p:sp>
-      <p:sp>
-        <p:nvSpPr>
-          <p:cNvPr id="22" name="TextBox 21"/>
+              <a:t>Photo + contact details</a:t>
+            </a:r>
+          </a:p>
+        </p:txBody>
+      </p:sp>
+      <p:sp>
+        <p:nvSpPr>
+          <p:cNvPr id="23" name="TextBox 22"/>
           <p:cNvSpPr txBox="1"/>
           <p:nvPr/>
         </p:nvSpPr>
         <p:spPr>
           <a:xfrm>
-            <a:off x="10972800" y="5340096"/>
+            <a:off x="10972800" y="5294376"/>
             <a:ext cx="3154680" cy="914400"/>
           </a:xfrm>
           <a:prstGeom prst="rect">
@@ -10220,7 +10088,7 @@
                 </a:solidFill>
                 <a:latin typeface="Arial"/>
               </a:rPr>
-              <a:t>Hosted outside the</a:t>
+              <a:t>Keep office and email</a:t>
             </a:r>
           </a:p>
           <a:p>
@@ -10239,7 +10107,7 @@
                 </a:solidFill>
                 <a:latin typeface="Arial"/>
               </a:rPr>
-              <a:t>Keough School website.</a:t>
+              <a:t>with the portrait.</a:t>
             </a:r>
           </a:p>
         </p:txBody>
@@ -10384,7 +10252,7 @@
                 </a:solidFill>
                 <a:latin typeface="Arial"/>
               </a:rPr>
-              <a:t>Past affiliation can be a simple list</a:t>
+              <a:t>An abridged biography adds institute context</a:t>
             </a:r>
           </a:p>
         </p:txBody>
@@ -10426,7 +10294,7 @@
                 </a:solidFill>
                 <a:latin typeface="Arial"/>
               </a:rPr>
-              <a:t>DRAFT FOR FEEDBACK  ·  Historical listings</a:t>
+              <a:t>DRAFT FOR FEEDBACK  ·  Profile destination 3</a:t>
             </a:r>
           </a:p>
         </p:txBody>
@@ -10511,7 +10379,995 @@
                 </a:solidFill>
                 <a:latin typeface="Arial"/>
               </a:rPr>
-              <a:t>7 / 7</a:t>
+              <a:t>7 / 8</a:t>
+            </a:r>
+          </a:p>
+        </p:txBody>
+      </p:sp>
+      <p:pic>
+        <p:nvPicPr>
+          <p:cNvPr id="8" name="Picture 7" descr="abridged.png">
+            <a:hlinkClick r:id="rId2"/>
+          </p:cNvPr>
+          <p:cNvPicPr>
+            <a:picLocks noChangeAspect="1"/>
+          </p:cNvPicPr>
+          <p:nvPr/>
+        </p:nvPicPr>
+        <p:blipFill>
+          <a:blip r:embed="rId4"/>
+          <a:stretch>
+            <a:fillRect/>
+          </a:stretch>
+        </p:blipFill>
+        <p:spPr>
+          <a:xfrm>
+            <a:off x="457200" y="1325880"/>
+            <a:ext cx="9372600" cy="6516188"/>
+          </a:xfrm>
+          <a:prstGeom prst="rect">
+            <a:avLst/>
+          </a:prstGeom>
+        </p:spPr>
+      </p:pic>
+      <p:sp>
+        <p:nvSpPr>
+          <p:cNvPr id="9" name="Rectangle 8"/>
+          <p:cNvSpPr/>
+          <p:nvPr/>
+        </p:nvSpPr>
+        <p:spPr>
+          <a:xfrm>
+            <a:off x="457200" y="1325880"/>
+            <a:ext cx="9372600" cy="6516188"/>
+          </a:xfrm>
+          <a:prstGeom prst="rect">
+            <a:avLst/>
+          </a:prstGeom>
+          <a:noFill/>
+          <a:ln w="7620">
+            <a:solidFill>
+              <a:srgbClr val="D5DBDF"/>
+            </a:solidFill>
+          </a:ln>
+        </p:spPr>
+        <p:style>
+          <a:lnRef idx="1">
+            <a:schemeClr val="accent1"/>
+          </a:lnRef>
+          <a:fillRef idx="3">
+            <a:schemeClr val="accent1"/>
+          </a:fillRef>
+          <a:effectRef idx="2">
+            <a:schemeClr val="accent1"/>
+          </a:effectRef>
+          <a:fontRef idx="minor">
+            <a:schemeClr val="lt1"/>
+          </a:fontRef>
+        </p:style>
+        <p:txBody>
+          <a:bodyPr rtlCol="0" anchor="ctr"/>
+          <a:lstStyle/>
+          <a:p>
+            <a:pPr algn="ctr"/>
+          </a:p>
+        </p:txBody>
+      </p:sp>
+      <p:sp>
+        <p:nvSpPr>
+          <p:cNvPr id="10" name="Rectangle 9"/>
+          <p:cNvSpPr/>
+          <p:nvPr/>
+        </p:nvSpPr>
+        <p:spPr>
+          <a:xfrm>
+            <a:off x="657279" y="3568265"/>
+            <a:ext cx="5717415" cy="2250948"/>
+          </a:xfrm>
+          <a:prstGeom prst="rect">
+            <a:avLst/>
+          </a:prstGeom>
+          <a:noFill/>
+          <a:ln w="25400">
+            <a:solidFill>
+              <a:srgbClr val="AE9142"/>
+            </a:solidFill>
+          </a:ln>
+        </p:spPr>
+        <p:style>
+          <a:lnRef idx="1">
+            <a:schemeClr val="accent1"/>
+          </a:lnRef>
+          <a:fillRef idx="3">
+            <a:schemeClr val="accent1"/>
+          </a:fillRef>
+          <a:effectRef idx="2">
+            <a:schemeClr val="accent1"/>
+          </a:effectRef>
+          <a:fontRef idx="minor">
+            <a:schemeClr val="lt1"/>
+          </a:fontRef>
+        </p:style>
+        <p:txBody>
+          <a:bodyPr rtlCol="0" anchor="ctr"/>
+          <a:lstStyle/>
+          <a:p>
+            <a:pPr algn="ctr"/>
+          </a:p>
+        </p:txBody>
+      </p:sp>
+      <p:sp>
+        <p:nvSpPr>
+          <p:cNvPr id="11" name="Oval 10"/>
+          <p:cNvSpPr/>
+          <p:nvPr/>
+        </p:nvSpPr>
+        <p:spPr>
+          <a:xfrm>
+            <a:off x="533835" y="3444821"/>
+            <a:ext cx="310896" cy="310896"/>
+          </a:xfrm>
+          <a:prstGeom prst="ellipse">
+            <a:avLst/>
+          </a:prstGeom>
+          <a:solidFill>
+            <a:srgbClr val="0C2340"/>
+          </a:solidFill>
+          <a:ln>
+            <a:noFill/>
+          </a:ln>
+        </p:spPr>
+        <p:style>
+          <a:lnRef idx="1">
+            <a:schemeClr val="accent1"/>
+          </a:lnRef>
+          <a:fillRef idx="3">
+            <a:schemeClr val="accent1"/>
+          </a:fillRef>
+          <a:effectRef idx="2">
+            <a:schemeClr val="accent1"/>
+          </a:effectRef>
+          <a:fontRef idx="minor">
+            <a:schemeClr val="lt1"/>
+          </a:fontRef>
+        </p:style>
+        <p:txBody>
+          <a:bodyPr rtlCol="0" anchor="ctr" lIns="0" rIns="0" tIns="0" bIns="0"/>
+          <a:lstStyle/>
+          <a:p>
+            <a:pPr algn="ctr"/>
+            <a:r>
+              <a:rPr sz="1300" b="1">
+                <a:solidFill>
+                  <a:srgbClr val="FFFFFF"/>
+                </a:solidFill>
+                <a:latin typeface="Arial"/>
+              </a:rPr>
+              <a:t>1</a:t>
+            </a:r>
+          </a:p>
+        </p:txBody>
+      </p:sp>
+      <p:sp>
+        <p:nvSpPr>
+          <p:cNvPr id="12" name="Rectangle 11"/>
+          <p:cNvSpPr/>
+          <p:nvPr/>
+        </p:nvSpPr>
+        <p:spPr>
+          <a:xfrm>
+            <a:off x="6703443" y="3568265"/>
+            <a:ext cx="2694193" cy="4305806"/>
+          </a:xfrm>
+          <a:prstGeom prst="rect">
+            <a:avLst/>
+          </a:prstGeom>
+          <a:noFill/>
+          <a:ln w="25400">
+            <a:solidFill>
+              <a:srgbClr val="AE9142"/>
+            </a:solidFill>
+          </a:ln>
+        </p:spPr>
+        <p:style>
+          <a:lnRef idx="1">
+            <a:schemeClr val="accent1"/>
+          </a:lnRef>
+          <a:fillRef idx="3">
+            <a:schemeClr val="accent1"/>
+          </a:fillRef>
+          <a:effectRef idx="2">
+            <a:schemeClr val="accent1"/>
+          </a:effectRef>
+          <a:fontRef idx="minor">
+            <a:schemeClr val="lt1"/>
+          </a:fontRef>
+        </p:style>
+        <p:txBody>
+          <a:bodyPr rtlCol="0" anchor="ctr"/>
+          <a:lstStyle/>
+          <a:p>
+            <a:pPr algn="ctr"/>
+          </a:p>
+        </p:txBody>
+      </p:sp>
+      <p:sp>
+        <p:nvSpPr>
+          <p:cNvPr id="13" name="Oval 12"/>
+          <p:cNvSpPr/>
+          <p:nvPr/>
+        </p:nvSpPr>
+        <p:spPr>
+          <a:xfrm>
+            <a:off x="6579999" y="3444821"/>
+            <a:ext cx="310896" cy="310896"/>
+          </a:xfrm>
+          <a:prstGeom prst="ellipse">
+            <a:avLst/>
+          </a:prstGeom>
+          <a:solidFill>
+            <a:srgbClr val="0C2340"/>
+          </a:solidFill>
+          <a:ln>
+            <a:noFill/>
+          </a:ln>
+        </p:spPr>
+        <p:style>
+          <a:lnRef idx="1">
+            <a:schemeClr val="accent1"/>
+          </a:lnRef>
+          <a:fillRef idx="3">
+            <a:schemeClr val="accent1"/>
+          </a:fillRef>
+          <a:effectRef idx="2">
+            <a:schemeClr val="accent1"/>
+          </a:effectRef>
+          <a:fontRef idx="minor">
+            <a:schemeClr val="lt1"/>
+          </a:fontRef>
+        </p:style>
+        <p:txBody>
+          <a:bodyPr rtlCol="0" anchor="ctr" lIns="0" rIns="0" tIns="0" bIns="0"/>
+          <a:lstStyle/>
+          <a:p>
+            <a:pPr algn="ctr"/>
+            <a:r>
+              <a:rPr sz="1300" b="1">
+                <a:solidFill>
+                  <a:srgbClr val="FFFFFF"/>
+                </a:solidFill>
+                <a:latin typeface="Arial"/>
+              </a:rPr>
+              <a:t>2</a:t>
+            </a:r>
+          </a:p>
+        </p:txBody>
+      </p:sp>
+      <p:sp>
+        <p:nvSpPr>
+          <p:cNvPr id="14" name="Rectangle 13"/>
+          <p:cNvSpPr/>
+          <p:nvPr/>
+        </p:nvSpPr>
+        <p:spPr>
+          <a:xfrm>
+            <a:off x="657279" y="5817689"/>
+            <a:ext cx="2161545" cy="506556"/>
+          </a:xfrm>
+          <a:prstGeom prst="rect">
+            <a:avLst/>
+          </a:prstGeom>
+          <a:noFill/>
+          <a:ln w="25400">
+            <a:solidFill>
+              <a:srgbClr val="AE9142"/>
+            </a:solidFill>
+          </a:ln>
+        </p:spPr>
+        <p:style>
+          <a:lnRef idx="1">
+            <a:schemeClr val="accent1"/>
+          </a:lnRef>
+          <a:fillRef idx="3">
+            <a:schemeClr val="accent1"/>
+          </a:fillRef>
+          <a:effectRef idx="2">
+            <a:schemeClr val="accent1"/>
+          </a:effectRef>
+          <a:fontRef idx="minor">
+            <a:schemeClr val="lt1"/>
+          </a:fontRef>
+        </p:style>
+        <p:txBody>
+          <a:bodyPr rtlCol="0" anchor="ctr"/>
+          <a:lstStyle/>
+          <a:p>
+            <a:pPr algn="ctr"/>
+          </a:p>
+        </p:txBody>
+      </p:sp>
+      <p:sp>
+        <p:nvSpPr>
+          <p:cNvPr id="15" name="Oval 14"/>
+          <p:cNvSpPr/>
+          <p:nvPr/>
+        </p:nvSpPr>
+        <p:spPr>
+          <a:xfrm>
+            <a:off x="533835" y="5694245"/>
+            <a:ext cx="310896" cy="310896"/>
+          </a:xfrm>
+          <a:prstGeom prst="ellipse">
+            <a:avLst/>
+          </a:prstGeom>
+          <a:solidFill>
+            <a:srgbClr val="0C2340"/>
+          </a:solidFill>
+          <a:ln>
+            <a:noFill/>
+          </a:ln>
+        </p:spPr>
+        <p:style>
+          <a:lnRef idx="1">
+            <a:schemeClr val="accent1"/>
+          </a:lnRef>
+          <a:fillRef idx="3">
+            <a:schemeClr val="accent1"/>
+          </a:fillRef>
+          <a:effectRef idx="2">
+            <a:schemeClr val="accent1"/>
+          </a:effectRef>
+          <a:fontRef idx="minor">
+            <a:schemeClr val="lt1"/>
+          </a:fontRef>
+        </p:style>
+        <p:txBody>
+          <a:bodyPr rtlCol="0" anchor="ctr" lIns="0" rIns="0" tIns="0" bIns="0"/>
+          <a:lstStyle/>
+          <a:p>
+            <a:pPr algn="ctr"/>
+            <a:r>
+              <a:rPr sz="1300" b="1">
+                <a:solidFill>
+                  <a:srgbClr val="FFFFFF"/>
+                </a:solidFill>
+                <a:latin typeface="Arial"/>
+              </a:rPr>
+              <a:t>3</a:t>
+            </a:r>
+          </a:p>
+        </p:txBody>
+      </p:sp>
+      <p:sp>
+        <p:nvSpPr>
+          <p:cNvPr id="16" name="Oval 15"/>
+          <p:cNvSpPr/>
+          <p:nvPr/>
+        </p:nvSpPr>
+        <p:spPr>
+          <a:xfrm>
+            <a:off x="10497312" y="1572768"/>
+            <a:ext cx="310896" cy="310896"/>
+          </a:xfrm>
+          <a:prstGeom prst="ellipse">
+            <a:avLst/>
+          </a:prstGeom>
+          <a:solidFill>
+            <a:srgbClr val="0C2340"/>
+          </a:solidFill>
+          <a:ln>
+            <a:noFill/>
+          </a:ln>
+        </p:spPr>
+        <p:style>
+          <a:lnRef idx="1">
+            <a:schemeClr val="accent1"/>
+          </a:lnRef>
+          <a:fillRef idx="3">
+            <a:schemeClr val="accent1"/>
+          </a:fillRef>
+          <a:effectRef idx="2">
+            <a:schemeClr val="accent1"/>
+          </a:effectRef>
+          <a:fontRef idx="minor">
+            <a:schemeClr val="lt1"/>
+          </a:fontRef>
+        </p:style>
+        <p:txBody>
+          <a:bodyPr rtlCol="0" anchor="ctr" lIns="0" rIns="0" tIns="0" bIns="0"/>
+          <a:lstStyle/>
+          <a:p>
+            <a:pPr algn="ctr"/>
+            <a:r>
+              <a:rPr sz="1300" b="1">
+                <a:solidFill>
+                  <a:srgbClr val="FFFFFF"/>
+                </a:solidFill>
+                <a:latin typeface="Arial"/>
+              </a:rPr>
+              <a:t>1</a:t>
+            </a:r>
+          </a:p>
+        </p:txBody>
+      </p:sp>
+      <p:sp>
+        <p:nvSpPr>
+          <p:cNvPr id="17" name="TextBox 16"/>
+          <p:cNvSpPr txBox="1"/>
+          <p:nvPr/>
+        </p:nvSpPr>
+        <p:spPr>
+          <a:xfrm>
+            <a:off x="10972800" y="1600200"/>
+            <a:ext cx="3200400" cy="502920"/>
+          </a:xfrm>
+          <a:prstGeom prst="rect">
+            <a:avLst/>
+          </a:prstGeom>
+          <a:noFill/>
+        </p:spPr>
+        <p:txBody>
+          <a:bodyPr wrap="square" lIns="0" rIns="0" tIns="0" bIns="0" anchor="t">
+            <a:spAutoFit/>
+          </a:bodyPr>
+          <a:lstStyle/>
+          <a:p>
+            <a:pPr>
+              <a:lnSpc>
+                <a:spcPct val="115000"/>
+              </a:lnSpc>
+              <a:spcAft>
+                <a:spcPts val="0"/>
+              </a:spcAft>
+            </a:pPr>
+            <a:r>
+              <a:rPr sz="1800" b="1">
+                <a:solidFill>
+                  <a:srgbClr val="0C2340"/>
+                </a:solidFill>
+                <a:latin typeface="Arial"/>
+              </a:rPr>
+              <a:t>Short, institute-specific</a:t>
+            </a:r>
+          </a:p>
+          <a:p>
+            <a:pPr>
+              <a:lnSpc>
+                <a:spcPct val="115000"/>
+              </a:lnSpc>
+              <a:spcAft>
+                <a:spcPts val="0"/>
+              </a:spcAft>
+            </a:pPr>
+            <a:r>
+              <a:rPr sz="1800" b="1">
+                <a:solidFill>
+                  <a:srgbClr val="0C2340"/>
+                </a:solidFill>
+                <a:latin typeface="Arial"/>
+              </a:rPr>
+              <a:t>biography</a:t>
+            </a:r>
+          </a:p>
+        </p:txBody>
+      </p:sp>
+      <p:sp>
+        <p:nvSpPr>
+          <p:cNvPr id="18" name="Oval 17"/>
+          <p:cNvSpPr/>
+          <p:nvPr/>
+        </p:nvSpPr>
+        <p:spPr>
+          <a:xfrm>
+            <a:off x="10497312" y="3264408"/>
+            <a:ext cx="310896" cy="310896"/>
+          </a:xfrm>
+          <a:prstGeom prst="ellipse">
+            <a:avLst/>
+          </a:prstGeom>
+          <a:solidFill>
+            <a:srgbClr val="0C2340"/>
+          </a:solidFill>
+          <a:ln>
+            <a:noFill/>
+          </a:ln>
+        </p:spPr>
+        <p:style>
+          <a:lnRef idx="1">
+            <a:schemeClr val="accent1"/>
+          </a:lnRef>
+          <a:fillRef idx="3">
+            <a:schemeClr val="accent1"/>
+          </a:fillRef>
+          <a:effectRef idx="2">
+            <a:schemeClr val="accent1"/>
+          </a:effectRef>
+          <a:fontRef idx="minor">
+            <a:schemeClr val="lt1"/>
+          </a:fontRef>
+        </p:style>
+        <p:txBody>
+          <a:bodyPr rtlCol="0" anchor="ctr" lIns="0" rIns="0" tIns="0" bIns="0"/>
+          <a:lstStyle/>
+          <a:p>
+            <a:pPr algn="ctr"/>
+            <a:r>
+              <a:rPr sz="1300" b="1">
+                <a:solidFill>
+                  <a:srgbClr val="FFFFFF"/>
+                </a:solidFill>
+                <a:latin typeface="Arial"/>
+              </a:rPr>
+              <a:t>2</a:t>
+            </a:r>
+          </a:p>
+        </p:txBody>
+      </p:sp>
+      <p:sp>
+        <p:nvSpPr>
+          <p:cNvPr id="19" name="TextBox 18"/>
+          <p:cNvSpPr txBox="1"/>
+          <p:nvPr/>
+        </p:nvSpPr>
+        <p:spPr>
+          <a:xfrm>
+            <a:off x="10972800" y="3291840"/>
+            <a:ext cx="3200400" cy="502920"/>
+          </a:xfrm>
+          <a:prstGeom prst="rect">
+            <a:avLst/>
+          </a:prstGeom>
+          <a:noFill/>
+        </p:spPr>
+        <p:txBody>
+          <a:bodyPr wrap="square" lIns="0" rIns="0" tIns="0" bIns="0" anchor="t">
+            <a:spAutoFit/>
+          </a:bodyPr>
+          <a:lstStyle/>
+          <a:p>
+            <a:pPr>
+              <a:lnSpc>
+                <a:spcPct val="115000"/>
+              </a:lnSpc>
+              <a:spcAft>
+                <a:spcPts val="0"/>
+              </a:spcAft>
+            </a:pPr>
+            <a:r>
+              <a:rPr sz="1800" b="1">
+                <a:solidFill>
+                  <a:srgbClr val="0C2340"/>
+                </a:solidFill>
+                <a:latin typeface="Arial"/>
+              </a:rPr>
+              <a:t>Photo + office + email</a:t>
+            </a:r>
+          </a:p>
+        </p:txBody>
+      </p:sp>
+      <p:sp>
+        <p:nvSpPr>
+          <p:cNvPr id="20" name="Oval 19"/>
+          <p:cNvSpPr/>
+          <p:nvPr/>
+        </p:nvSpPr>
+        <p:spPr>
+          <a:xfrm>
+            <a:off x="10497312" y="4727448"/>
+            <a:ext cx="310896" cy="310896"/>
+          </a:xfrm>
+          <a:prstGeom prst="ellipse">
+            <a:avLst/>
+          </a:prstGeom>
+          <a:solidFill>
+            <a:srgbClr val="0C2340"/>
+          </a:solidFill>
+          <a:ln>
+            <a:noFill/>
+          </a:ln>
+        </p:spPr>
+        <p:style>
+          <a:lnRef idx="1">
+            <a:schemeClr val="accent1"/>
+          </a:lnRef>
+          <a:fillRef idx="3">
+            <a:schemeClr val="accent1"/>
+          </a:fillRef>
+          <a:effectRef idx="2">
+            <a:schemeClr val="accent1"/>
+          </a:effectRef>
+          <a:fontRef idx="minor">
+            <a:schemeClr val="lt1"/>
+          </a:fontRef>
+        </p:style>
+        <p:txBody>
+          <a:bodyPr rtlCol="0" anchor="ctr" lIns="0" rIns="0" tIns="0" bIns="0"/>
+          <a:lstStyle/>
+          <a:p>
+            <a:pPr algn="ctr"/>
+            <a:r>
+              <a:rPr sz="1300" b="1">
+                <a:solidFill>
+                  <a:srgbClr val="FFFFFF"/>
+                </a:solidFill>
+                <a:latin typeface="Arial"/>
+              </a:rPr>
+              <a:t>3</a:t>
+            </a:r>
+          </a:p>
+        </p:txBody>
+      </p:sp>
+      <p:sp>
+        <p:nvSpPr>
+          <p:cNvPr id="21" name="TextBox 20"/>
+          <p:cNvSpPr txBox="1"/>
+          <p:nvPr/>
+        </p:nvSpPr>
+        <p:spPr>
+          <a:xfrm>
+            <a:off x="10972800" y="4754880"/>
+            <a:ext cx="3200400" cy="502920"/>
+          </a:xfrm>
+          <a:prstGeom prst="rect">
+            <a:avLst/>
+          </a:prstGeom>
+          <a:noFill/>
+        </p:spPr>
+        <p:txBody>
+          <a:bodyPr wrap="square" lIns="0" rIns="0" tIns="0" bIns="0" anchor="t">
+            <a:spAutoFit/>
+          </a:bodyPr>
+          <a:lstStyle/>
+          <a:p>
+            <a:pPr>
+              <a:lnSpc>
+                <a:spcPct val="115000"/>
+              </a:lnSpc>
+              <a:spcAft>
+                <a:spcPts val="0"/>
+              </a:spcAft>
+            </a:pPr>
+            <a:r>
+              <a:rPr sz="1800" b="1">
+                <a:solidFill>
+                  <a:srgbClr val="0C2340"/>
+                </a:solidFill>
+                <a:latin typeface="Arial"/>
+              </a:rPr>
+              <a:t>Button to the full bio</a:t>
+            </a:r>
+          </a:p>
+        </p:txBody>
+      </p:sp>
+      <p:sp>
+        <p:nvSpPr>
+          <p:cNvPr id="22" name="TextBox 21"/>
+          <p:cNvSpPr txBox="1"/>
+          <p:nvPr/>
+        </p:nvSpPr>
+        <p:spPr>
+          <a:xfrm>
+            <a:off x="10972800" y="5340096"/>
+            <a:ext cx="3154680" cy="914400"/>
+          </a:xfrm>
+          <a:prstGeom prst="rect">
+            <a:avLst/>
+          </a:prstGeom>
+          <a:noFill/>
+        </p:spPr>
+        <p:txBody>
+          <a:bodyPr wrap="square" lIns="0" rIns="0" tIns="0" bIns="0" anchor="t">
+            <a:spAutoFit/>
+          </a:bodyPr>
+          <a:lstStyle/>
+          <a:p>
+            <a:pPr>
+              <a:lnSpc>
+                <a:spcPct val="115000"/>
+              </a:lnSpc>
+              <a:spcAft>
+                <a:spcPts val="0"/>
+              </a:spcAft>
+            </a:pPr>
+            <a:r>
+              <a:rPr sz="1400" b="0">
+                <a:solidFill>
+                  <a:srgbClr val="52616D"/>
+                </a:solidFill>
+                <a:latin typeface="Arial"/>
+              </a:rPr>
+              <a:t>Hosted outside the</a:t>
+            </a:r>
+          </a:p>
+          <a:p>
+            <a:pPr>
+              <a:lnSpc>
+                <a:spcPct val="115000"/>
+              </a:lnSpc>
+              <a:spcAft>
+                <a:spcPts val="0"/>
+              </a:spcAft>
+            </a:pPr>
+            <a:r>
+              <a:rPr sz="1400" b="0">
+                <a:solidFill>
+                  <a:srgbClr val="52616D"/>
+                </a:solidFill>
+                <a:latin typeface="Arial"/>
+              </a:rPr>
+              <a:t>Keough School website.</a:t>
+            </a:r>
+          </a:p>
+        </p:txBody>
+      </p:sp>
+    </p:spTree>
+  </p:cSld>
+  <p:clrMapOvr>
+    <a:masterClrMapping/>
+  </p:clrMapOvr>
+</p:sld>
+</file>
+
+<file path=ppt/slides/slide8.xml><?xml version="1.0" encoding="utf-8"?>
+<p:sld xmlns:a="http://schemas.openxmlformats.org/drawingml/2006/main" xmlns:p="http://schemas.openxmlformats.org/presentationml/2006/main" xmlns:r="http://schemas.openxmlformats.org/officeDocument/2006/relationships">
+  <p:cSld>
+    <p:spTree>
+      <p:nvGrpSpPr>
+        <p:cNvPr id="1" name=""/>
+        <p:cNvGrpSpPr/>
+        <p:nvPr/>
+      </p:nvGrpSpPr>
+      <p:grpSpPr/>
+      <p:sp>
+        <p:nvSpPr>
+          <p:cNvPr id="2" name="Rectangle 1"/>
+          <p:cNvSpPr/>
+          <p:nvPr/>
+        </p:nvSpPr>
+        <p:spPr>
+          <a:xfrm>
+            <a:off x="0" y="0"/>
+            <a:ext cx="14630400" cy="50292"/>
+          </a:xfrm>
+          <a:prstGeom prst="rect">
+            <a:avLst/>
+          </a:prstGeom>
+          <a:solidFill>
+            <a:srgbClr val="AE9142"/>
+          </a:solidFill>
+          <a:ln>
+            <a:noFill/>
+          </a:ln>
+        </p:spPr>
+        <p:style>
+          <a:lnRef idx="1">
+            <a:schemeClr val="accent1"/>
+          </a:lnRef>
+          <a:fillRef idx="3">
+            <a:schemeClr val="accent1"/>
+          </a:fillRef>
+          <a:effectRef idx="2">
+            <a:schemeClr val="accent1"/>
+          </a:effectRef>
+          <a:fontRef idx="minor">
+            <a:schemeClr val="lt1"/>
+          </a:fontRef>
+        </p:style>
+        <p:txBody>
+          <a:bodyPr rtlCol="0" anchor="ctr"/>
+          <a:lstStyle/>
+          <a:p>
+            <a:pPr algn="ctr"/>
+          </a:p>
+        </p:txBody>
+      </p:sp>
+      <p:sp>
+        <p:nvSpPr>
+          <p:cNvPr id="3" name="TextBox 2"/>
+          <p:cNvSpPr txBox="1"/>
+          <p:nvPr/>
+        </p:nvSpPr>
+        <p:spPr>
+          <a:xfrm>
+            <a:off x="457200" y="182880"/>
+            <a:ext cx="13716000" cy="182880"/>
+          </a:xfrm>
+          <a:prstGeom prst="rect">
+            <a:avLst/>
+          </a:prstGeom>
+          <a:noFill/>
+        </p:spPr>
+        <p:txBody>
+          <a:bodyPr wrap="square" lIns="0" rIns="0" tIns="0" bIns="0" anchor="t">
+            <a:spAutoFit/>
+          </a:bodyPr>
+          <a:lstStyle/>
+          <a:p>
+            <a:pPr>
+              <a:lnSpc>
+                <a:spcPct val="115000"/>
+              </a:lnSpc>
+              <a:spcAft>
+                <a:spcPts val="0"/>
+              </a:spcAft>
+            </a:pPr>
+            <a:r>
+              <a:rPr sz="900" b="1">
+                <a:solidFill>
+                  <a:srgbClr val="52616D"/>
+                </a:solidFill>
+                <a:latin typeface="Arial"/>
+              </a:rPr>
+              <a:t>PROPOSED STANDARD  /  INSTITUTE PEOPLE PAGES</a:t>
+            </a:r>
+          </a:p>
+        </p:txBody>
+      </p:sp>
+      <p:sp>
+        <p:nvSpPr>
+          <p:cNvPr id="4" name="TextBox 3"/>
+          <p:cNvSpPr txBox="1"/>
+          <p:nvPr/>
+        </p:nvSpPr>
+        <p:spPr>
+          <a:xfrm>
+            <a:off x="457200" y="502920"/>
+            <a:ext cx="13716000" cy="548640"/>
+          </a:xfrm>
+          <a:prstGeom prst="rect">
+            <a:avLst/>
+          </a:prstGeom>
+          <a:noFill/>
+        </p:spPr>
+        <p:txBody>
+          <a:bodyPr wrap="square" lIns="0" rIns="0" tIns="0" bIns="0" anchor="t">
+            <a:spAutoFit/>
+          </a:bodyPr>
+          <a:lstStyle/>
+          <a:p>
+            <a:pPr>
+              <a:lnSpc>
+                <a:spcPct val="115000"/>
+              </a:lnSpc>
+              <a:spcAft>
+                <a:spcPts val="0"/>
+              </a:spcAft>
+            </a:pPr>
+            <a:r>
+              <a:rPr sz="3000" b="1">
+                <a:solidFill>
+                  <a:srgbClr val="0C2340"/>
+                </a:solidFill>
+                <a:latin typeface="Arial"/>
+              </a:rPr>
+              <a:t>Past affiliation can be a simple list</a:t>
+            </a:r>
+          </a:p>
+        </p:txBody>
+      </p:sp>
+      <p:sp>
+        <p:nvSpPr>
+          <p:cNvPr id="5" name="TextBox 4"/>
+          <p:cNvSpPr txBox="1"/>
+          <p:nvPr/>
+        </p:nvSpPr>
+        <p:spPr>
+          <a:xfrm>
+            <a:off x="457200" y="7973568"/>
+            <a:ext cx="9144000" cy="164592"/>
+          </a:xfrm>
+          <a:prstGeom prst="rect">
+            <a:avLst/>
+          </a:prstGeom>
+          <a:noFill/>
+        </p:spPr>
+        <p:txBody>
+          <a:bodyPr wrap="square" lIns="0" rIns="0" tIns="0" bIns="0" anchor="t">
+            <a:spAutoFit/>
+          </a:bodyPr>
+          <a:lstStyle/>
+          <a:p>
+            <a:pPr>
+              <a:lnSpc>
+                <a:spcPct val="115000"/>
+              </a:lnSpc>
+              <a:spcAft>
+                <a:spcPts val="0"/>
+              </a:spcAft>
+            </a:pPr>
+            <a:r>
+              <a:rPr sz="900" b="0">
+                <a:solidFill>
+                  <a:srgbClr val="52616D"/>
+                </a:solidFill>
+                <a:latin typeface="Arial"/>
+              </a:rPr>
+              <a:t>DRAFT FOR FEEDBACK  ·  Historical listings</a:t>
+            </a:r>
+          </a:p>
+        </p:txBody>
+      </p:sp>
+      <p:sp>
+        <p:nvSpPr>
+          <p:cNvPr id="6" name="TextBox 5"/>
+          <p:cNvSpPr txBox="1"/>
+          <p:nvPr/>
+        </p:nvSpPr>
+        <p:spPr>
+          <a:xfrm>
+            <a:off x="11338560" y="7973568"/>
+            <a:ext cx="2377440" cy="164592"/>
+          </a:xfrm>
+          <a:prstGeom prst="rect">
+            <a:avLst/>
+          </a:prstGeom>
+          <a:noFill/>
+        </p:spPr>
+        <p:txBody>
+          <a:bodyPr wrap="square" lIns="0" rIns="0" tIns="0" bIns="0" anchor="t">
+            <a:spAutoFit/>
+          </a:bodyPr>
+          <a:lstStyle/>
+          <a:p>
+            <a:pPr>
+              <a:lnSpc>
+                <a:spcPct val="115000"/>
+              </a:lnSpc>
+              <a:spcAft>
+                <a:spcPts val="0"/>
+              </a:spcAft>
+            </a:pPr>
+            <a:r>
+              <a:rPr sz="900" b="0">
+                <a:solidFill>
+                  <a:srgbClr val="52616D"/>
+                </a:solidFill>
+                <a:latin typeface="Arial"/>
+                <a:hlinkClick r:id="rId2"/>
+              </a:rPr>
+              <a:t>Open the live example</a:t>
+            </a:r>
+          </a:p>
+        </p:txBody>
+      </p:sp>
+      <p:sp>
+        <p:nvSpPr>
+          <p:cNvPr id="7" name="TextBox 6"/>
+          <p:cNvSpPr txBox="1"/>
+          <p:nvPr/>
+        </p:nvSpPr>
+        <p:spPr>
+          <a:xfrm>
+            <a:off x="13944600" y="7973568"/>
+            <a:ext cx="457200" cy="164592"/>
+          </a:xfrm>
+          <a:prstGeom prst="rect">
+            <a:avLst/>
+          </a:prstGeom>
+          <a:noFill/>
+        </p:spPr>
+        <p:txBody>
+          <a:bodyPr wrap="square" lIns="0" rIns="0" tIns="0" bIns="0" anchor="t">
+            <a:spAutoFit/>
+          </a:bodyPr>
+          <a:lstStyle/>
+          <a:p>
+            <a:pPr>
+              <a:lnSpc>
+                <a:spcPct val="115000"/>
+              </a:lnSpc>
+              <a:spcAft>
+                <a:spcPts val="0"/>
+              </a:spcAft>
+            </a:pPr>
+            <a:r>
+              <a:rPr sz="900" b="0">
+                <a:solidFill>
+                  <a:srgbClr val="52616D"/>
+                </a:solidFill>
+                <a:latin typeface="Arial"/>
+              </a:rPr>
+              <a:t>8 / 8</a:t>
             </a:r>
           </a:p>
         </p:txBody>
